--- a/multimodal_olfactory_feedback/hernandez_etal_2025.pptx
+++ b/multimodal_olfactory_feedback/hernandez_etal_2025.pptx
@@ -4,20 +4,31 @@
   <p:sldMasterIdLst>
     <p:sldMasterId id="2147483648" r:id="rId1"/>
   </p:sldMasterIdLst>
+  <p:notesMasterIdLst>
+    <p:notesMasterId r:id="rId23"/>
+  </p:notesMasterIdLst>
   <p:sldIdLst>
     <p:sldId id="256" r:id="rId2"/>
     <p:sldId id="259" r:id="rId3"/>
-    <p:sldId id="258" r:id="rId4"/>
-    <p:sldId id="260" r:id="rId5"/>
-    <p:sldId id="261" r:id="rId6"/>
+    <p:sldId id="271" r:id="rId4"/>
+    <p:sldId id="258" r:id="rId5"/>
+    <p:sldId id="260" r:id="rId6"/>
     <p:sldId id="262" r:id="rId7"/>
-    <p:sldId id="263" r:id="rId8"/>
-    <p:sldId id="264" r:id="rId9"/>
-    <p:sldId id="265" r:id="rId10"/>
-    <p:sldId id="266" r:id="rId11"/>
-    <p:sldId id="267" r:id="rId12"/>
-    <p:sldId id="268" r:id="rId13"/>
-    <p:sldId id="269" r:id="rId14"/>
+    <p:sldId id="278" r:id="rId8"/>
+    <p:sldId id="263" r:id="rId9"/>
+    <p:sldId id="264" r:id="rId10"/>
+    <p:sldId id="265" r:id="rId11"/>
+    <p:sldId id="266" r:id="rId12"/>
+    <p:sldId id="267" r:id="rId13"/>
+    <p:sldId id="268" r:id="rId14"/>
+    <p:sldId id="269" r:id="rId15"/>
+    <p:sldId id="275" r:id="rId16"/>
+    <p:sldId id="272" r:id="rId17"/>
+    <p:sldId id="270" r:id="rId18"/>
+    <p:sldId id="273" r:id="rId19"/>
+    <p:sldId id="276" r:id="rId20"/>
+    <p:sldId id="274" r:id="rId21"/>
+    <p:sldId id="277" r:id="rId22"/>
   </p:sldIdLst>
   <p:sldSz cx="12192000" cy="6858000"/>
   <p:notesSz cx="6858000" cy="9144000"/>
@@ -116,7 +127,1068 @@
       </a:defRPr>
     </a:lvl9pPr>
   </p:defaultTextStyle>
+  <p:extLst>
+    <p:ext uri="{EFAFB233-063F-42B5-8137-9DF3F51BA10A}">
+      <p15:sldGuideLst xmlns:p15="http://schemas.microsoft.com/office/powerpoint/2012/main"/>
+    </p:ext>
+  </p:extLst>
 </p:presentation>
+</file>
+
+<file path=ppt/notesMasters/notesMaster1.xml><?xml version="1.0" encoding="utf-8"?>
+<p:notesMaster xmlns:a="http://schemas.openxmlformats.org/drawingml/2006/main" xmlns:r="http://schemas.openxmlformats.org/officeDocument/2006/relationships" xmlns:p="http://schemas.openxmlformats.org/presentationml/2006/main">
+  <p:cSld>
+    <p:bg>
+      <p:bgRef idx="1001">
+        <a:schemeClr val="bg1"/>
+      </p:bgRef>
+    </p:bg>
+    <p:spTree>
+      <p:nvGrpSpPr>
+        <p:cNvPr id="1" name=""/>
+        <p:cNvGrpSpPr/>
+        <p:nvPr/>
+      </p:nvGrpSpPr>
+      <p:grpSpPr>
+        <a:xfrm>
+          <a:off x="0" y="0"/>
+          <a:ext cx="0" cy="0"/>
+          <a:chOff x="0" y="0"/>
+          <a:chExt cx="0" cy="0"/>
+        </a:xfrm>
+      </p:grpSpPr>
+      <p:sp>
+        <p:nvSpPr>
+          <p:cNvPr id="2" name="Header Placeholder 1"/>
+          <p:cNvSpPr>
+            <a:spLocks noGrp="1"/>
+          </p:cNvSpPr>
+          <p:nvPr>
+            <p:ph type="hdr" sz="quarter"/>
+          </p:nvPr>
+        </p:nvSpPr>
+        <p:spPr>
+          <a:xfrm>
+            <a:off x="0" y="0"/>
+            <a:ext cx="2971800" cy="458788"/>
+          </a:xfrm>
+          <a:prstGeom prst="rect">
+            <a:avLst/>
+          </a:prstGeom>
+        </p:spPr>
+        <p:txBody>
+          <a:bodyPr vert="horz" lIns="91440" tIns="45720" rIns="91440" bIns="45720" rtlCol="0"/>
+          <a:lstStyle>
+            <a:lvl1pPr algn="l">
+              <a:defRPr sz="1200"/>
+            </a:lvl1pPr>
+          </a:lstStyle>
+          <a:p>
+            <a:endParaRPr lang="en-US"/>
+          </a:p>
+        </p:txBody>
+      </p:sp>
+      <p:sp>
+        <p:nvSpPr>
+          <p:cNvPr id="3" name="Date Placeholder 2"/>
+          <p:cNvSpPr>
+            <a:spLocks noGrp="1"/>
+          </p:cNvSpPr>
+          <p:nvPr>
+            <p:ph type="dt" idx="1"/>
+          </p:nvPr>
+        </p:nvSpPr>
+        <p:spPr>
+          <a:xfrm>
+            <a:off x="3884613" y="0"/>
+            <a:ext cx="2971800" cy="458788"/>
+          </a:xfrm>
+          <a:prstGeom prst="rect">
+            <a:avLst/>
+          </a:prstGeom>
+        </p:spPr>
+        <p:txBody>
+          <a:bodyPr vert="horz" lIns="91440" tIns="45720" rIns="91440" bIns="45720" rtlCol="0"/>
+          <a:lstStyle>
+            <a:lvl1pPr algn="r">
+              <a:defRPr sz="1200"/>
+            </a:lvl1pPr>
+          </a:lstStyle>
+          <a:p>
+            <a:fld id="{AB540900-7A08-4BC6-B24F-7DB1CCCBAD6C}" type="datetimeFigureOut">
+              <a:rPr lang="en-US" smtClean="0"/>
+              <a:t>4/14/2026</a:t>
+            </a:fld>
+            <a:endParaRPr lang="en-US"/>
+          </a:p>
+        </p:txBody>
+      </p:sp>
+      <p:sp>
+        <p:nvSpPr>
+          <p:cNvPr id="4" name="Slide Image Placeholder 3"/>
+          <p:cNvSpPr>
+            <a:spLocks noGrp="1" noRot="1" noChangeAspect="1"/>
+          </p:cNvSpPr>
+          <p:nvPr>
+            <p:ph type="sldImg" idx="2"/>
+          </p:nvPr>
+        </p:nvSpPr>
+        <p:spPr>
+          <a:xfrm>
+            <a:off x="685800" y="1143000"/>
+            <a:ext cx="5486400" cy="3086100"/>
+          </a:xfrm>
+          <a:prstGeom prst="rect">
+            <a:avLst/>
+          </a:prstGeom>
+          <a:noFill/>
+          <a:ln w="12700">
+            <a:solidFill>
+              <a:prstClr val="black"/>
+            </a:solidFill>
+          </a:ln>
+        </p:spPr>
+        <p:txBody>
+          <a:bodyPr vert="horz" lIns="91440" tIns="45720" rIns="91440" bIns="45720" rtlCol="0" anchor="ctr"/>
+          <a:lstStyle/>
+          <a:p>
+            <a:endParaRPr lang="en-US"/>
+          </a:p>
+        </p:txBody>
+      </p:sp>
+      <p:sp>
+        <p:nvSpPr>
+          <p:cNvPr id="5" name="Notes Placeholder 4"/>
+          <p:cNvSpPr>
+            <a:spLocks noGrp="1"/>
+          </p:cNvSpPr>
+          <p:nvPr>
+            <p:ph type="body" sz="quarter" idx="3"/>
+          </p:nvPr>
+        </p:nvSpPr>
+        <p:spPr>
+          <a:xfrm>
+            <a:off x="685800" y="4400550"/>
+            <a:ext cx="5486400" cy="3600450"/>
+          </a:xfrm>
+          <a:prstGeom prst="rect">
+            <a:avLst/>
+          </a:prstGeom>
+        </p:spPr>
+        <p:txBody>
+          <a:bodyPr vert="horz" lIns="91440" tIns="45720" rIns="91440" bIns="45720" rtlCol="0"/>
+          <a:lstStyle/>
+          <a:p>
+            <a:pPr lvl="0"/>
+            <a:r>
+              <a:rPr lang="en-US"/>
+              <a:t>Click to edit Master text styles</a:t>
+            </a:r>
+          </a:p>
+          <a:p>
+            <a:pPr lvl="1"/>
+            <a:r>
+              <a:rPr lang="en-US"/>
+              <a:t>Second level</a:t>
+            </a:r>
+          </a:p>
+          <a:p>
+            <a:pPr lvl="2"/>
+            <a:r>
+              <a:rPr lang="en-US"/>
+              <a:t>Third level</a:t>
+            </a:r>
+          </a:p>
+          <a:p>
+            <a:pPr lvl="3"/>
+            <a:r>
+              <a:rPr lang="en-US"/>
+              <a:t>Fourth level</a:t>
+            </a:r>
+          </a:p>
+          <a:p>
+            <a:pPr lvl="4"/>
+            <a:r>
+              <a:rPr lang="en-US"/>
+              <a:t>Fifth level</a:t>
+            </a:r>
+          </a:p>
+        </p:txBody>
+      </p:sp>
+      <p:sp>
+        <p:nvSpPr>
+          <p:cNvPr id="6" name="Footer Placeholder 5"/>
+          <p:cNvSpPr>
+            <a:spLocks noGrp="1"/>
+          </p:cNvSpPr>
+          <p:nvPr>
+            <p:ph type="ftr" sz="quarter" idx="4"/>
+          </p:nvPr>
+        </p:nvSpPr>
+        <p:spPr>
+          <a:xfrm>
+            <a:off x="0" y="8685213"/>
+            <a:ext cx="2971800" cy="458787"/>
+          </a:xfrm>
+          <a:prstGeom prst="rect">
+            <a:avLst/>
+          </a:prstGeom>
+        </p:spPr>
+        <p:txBody>
+          <a:bodyPr vert="horz" lIns="91440" tIns="45720" rIns="91440" bIns="45720" rtlCol="0" anchor="b"/>
+          <a:lstStyle>
+            <a:lvl1pPr algn="l">
+              <a:defRPr sz="1200"/>
+            </a:lvl1pPr>
+          </a:lstStyle>
+          <a:p>
+            <a:endParaRPr lang="en-US"/>
+          </a:p>
+        </p:txBody>
+      </p:sp>
+      <p:sp>
+        <p:nvSpPr>
+          <p:cNvPr id="7" name="Slide Number Placeholder 6"/>
+          <p:cNvSpPr>
+            <a:spLocks noGrp="1"/>
+          </p:cNvSpPr>
+          <p:nvPr>
+            <p:ph type="sldNum" sz="quarter" idx="5"/>
+          </p:nvPr>
+        </p:nvSpPr>
+        <p:spPr>
+          <a:xfrm>
+            <a:off x="3884613" y="8685213"/>
+            <a:ext cx="2971800" cy="458787"/>
+          </a:xfrm>
+          <a:prstGeom prst="rect">
+            <a:avLst/>
+          </a:prstGeom>
+        </p:spPr>
+        <p:txBody>
+          <a:bodyPr vert="horz" lIns="91440" tIns="45720" rIns="91440" bIns="45720" rtlCol="0" anchor="b"/>
+          <a:lstStyle>
+            <a:lvl1pPr algn="r">
+              <a:defRPr sz="1200"/>
+            </a:lvl1pPr>
+          </a:lstStyle>
+          <a:p>
+            <a:fld id="{B747A4E7-60C9-462D-82EF-3B8321F757EB}" type="slidenum">
+              <a:rPr lang="en-US" smtClean="0"/>
+              <a:t>‹#›</a:t>
+            </a:fld>
+            <a:endParaRPr lang="en-US"/>
+          </a:p>
+        </p:txBody>
+      </p:sp>
+    </p:spTree>
+    <p:extLst>
+      <p:ext uri="{BB962C8B-B14F-4D97-AF65-F5344CB8AC3E}">
+        <p14:creationId xmlns:p14="http://schemas.microsoft.com/office/powerpoint/2010/main" val="3625162285"/>
+      </p:ext>
+    </p:extLst>
+  </p:cSld>
+  <p:clrMap bg1="lt1" tx1="dk1" bg2="lt2" tx2="dk2" accent1="accent1" accent2="accent2" accent3="accent3" accent4="accent4" accent5="accent5" accent6="accent6" hlink="hlink" folHlink="folHlink"/>
+  <p:notesStyle>
+    <a:lvl1pPr marL="0" algn="l" defTabSz="914400" rtl="0" eaLnBrk="1" latinLnBrk="0" hangingPunct="1">
+      <a:defRPr sz="1200" kern="1200">
+        <a:solidFill>
+          <a:schemeClr val="tx1"/>
+        </a:solidFill>
+        <a:latin typeface="+mn-lt"/>
+        <a:ea typeface="+mn-ea"/>
+        <a:cs typeface="+mn-cs"/>
+      </a:defRPr>
+    </a:lvl1pPr>
+    <a:lvl2pPr marL="457200" algn="l" defTabSz="914400" rtl="0" eaLnBrk="1" latinLnBrk="0" hangingPunct="1">
+      <a:defRPr sz="1200" kern="1200">
+        <a:solidFill>
+          <a:schemeClr val="tx1"/>
+        </a:solidFill>
+        <a:latin typeface="+mn-lt"/>
+        <a:ea typeface="+mn-ea"/>
+        <a:cs typeface="+mn-cs"/>
+      </a:defRPr>
+    </a:lvl2pPr>
+    <a:lvl3pPr marL="914400" algn="l" defTabSz="914400" rtl="0" eaLnBrk="1" latinLnBrk="0" hangingPunct="1">
+      <a:defRPr sz="1200" kern="1200">
+        <a:solidFill>
+          <a:schemeClr val="tx1"/>
+        </a:solidFill>
+        <a:latin typeface="+mn-lt"/>
+        <a:ea typeface="+mn-ea"/>
+        <a:cs typeface="+mn-cs"/>
+      </a:defRPr>
+    </a:lvl3pPr>
+    <a:lvl4pPr marL="1371600" algn="l" defTabSz="914400" rtl="0" eaLnBrk="1" latinLnBrk="0" hangingPunct="1">
+      <a:defRPr sz="1200" kern="1200">
+        <a:solidFill>
+          <a:schemeClr val="tx1"/>
+        </a:solidFill>
+        <a:latin typeface="+mn-lt"/>
+        <a:ea typeface="+mn-ea"/>
+        <a:cs typeface="+mn-cs"/>
+      </a:defRPr>
+    </a:lvl4pPr>
+    <a:lvl5pPr marL="1828800" algn="l" defTabSz="914400" rtl="0" eaLnBrk="1" latinLnBrk="0" hangingPunct="1">
+      <a:defRPr sz="1200" kern="1200">
+        <a:solidFill>
+          <a:schemeClr val="tx1"/>
+        </a:solidFill>
+        <a:latin typeface="+mn-lt"/>
+        <a:ea typeface="+mn-ea"/>
+        <a:cs typeface="+mn-cs"/>
+      </a:defRPr>
+    </a:lvl5pPr>
+    <a:lvl6pPr marL="2286000" algn="l" defTabSz="914400" rtl="0" eaLnBrk="1" latinLnBrk="0" hangingPunct="1">
+      <a:defRPr sz="1200" kern="1200">
+        <a:solidFill>
+          <a:schemeClr val="tx1"/>
+        </a:solidFill>
+        <a:latin typeface="+mn-lt"/>
+        <a:ea typeface="+mn-ea"/>
+        <a:cs typeface="+mn-cs"/>
+      </a:defRPr>
+    </a:lvl6pPr>
+    <a:lvl7pPr marL="2743200" algn="l" defTabSz="914400" rtl="0" eaLnBrk="1" latinLnBrk="0" hangingPunct="1">
+      <a:defRPr sz="1200" kern="1200">
+        <a:solidFill>
+          <a:schemeClr val="tx1"/>
+        </a:solidFill>
+        <a:latin typeface="+mn-lt"/>
+        <a:ea typeface="+mn-ea"/>
+        <a:cs typeface="+mn-cs"/>
+      </a:defRPr>
+    </a:lvl7pPr>
+    <a:lvl8pPr marL="3200400" algn="l" defTabSz="914400" rtl="0" eaLnBrk="1" latinLnBrk="0" hangingPunct="1">
+      <a:defRPr sz="1200" kern="1200">
+        <a:solidFill>
+          <a:schemeClr val="tx1"/>
+        </a:solidFill>
+        <a:latin typeface="+mn-lt"/>
+        <a:ea typeface="+mn-ea"/>
+        <a:cs typeface="+mn-cs"/>
+      </a:defRPr>
+    </a:lvl8pPr>
+    <a:lvl9pPr marL="3657600" algn="l" defTabSz="914400" rtl="0" eaLnBrk="1" latinLnBrk="0" hangingPunct="1">
+      <a:defRPr sz="1200" kern="1200">
+        <a:solidFill>
+          <a:schemeClr val="tx1"/>
+        </a:solidFill>
+        <a:latin typeface="+mn-lt"/>
+        <a:ea typeface="+mn-ea"/>
+        <a:cs typeface="+mn-cs"/>
+      </a:defRPr>
+    </a:lvl9pPr>
+  </p:notesStyle>
+</p:notesMaster>
+</file>
+
+<file path=ppt/notesSlides/notesSlide1.xml><?xml version="1.0" encoding="utf-8"?>
+<p:notes xmlns:a="http://schemas.openxmlformats.org/drawingml/2006/main" xmlns:r="http://schemas.openxmlformats.org/officeDocument/2006/relationships" xmlns:p="http://schemas.openxmlformats.org/presentationml/2006/main">
+  <p:cSld>
+    <p:spTree>
+      <p:nvGrpSpPr>
+        <p:cNvPr id="1" name=""/>
+        <p:cNvGrpSpPr/>
+        <p:nvPr/>
+      </p:nvGrpSpPr>
+      <p:grpSpPr>
+        <a:xfrm>
+          <a:off x="0" y="0"/>
+          <a:ext cx="0" cy="0"/>
+          <a:chOff x="0" y="0"/>
+          <a:chExt cx="0" cy="0"/>
+        </a:xfrm>
+      </p:grpSpPr>
+      <p:sp>
+        <p:nvSpPr>
+          <p:cNvPr id="2" name="Slide Image Placeholder 1"/>
+          <p:cNvSpPr>
+            <a:spLocks noGrp="1" noRot="1" noChangeAspect="1"/>
+          </p:cNvSpPr>
+          <p:nvPr>
+            <p:ph type="sldImg"/>
+          </p:nvPr>
+        </p:nvSpPr>
+        <p:spPr/>
+      </p:sp>
+      <p:sp>
+        <p:nvSpPr>
+          <p:cNvPr id="3" name="Notes Placeholder 2"/>
+          <p:cNvSpPr>
+            <a:spLocks noGrp="1"/>
+          </p:cNvSpPr>
+          <p:nvPr>
+            <p:ph type="body" idx="1"/>
+          </p:nvPr>
+        </p:nvSpPr>
+        <p:spPr/>
+        <p:txBody>
+          <a:bodyPr/>
+          <a:lstStyle/>
+          <a:p>
+            <a:r>
+              <a:rPr lang="en-US" dirty="0"/>
+              <a:t>MicevirallyexpressingGCaMP5inthe </a:t>
+            </a:r>
+            <a:r>
+              <a:rPr lang="en-US" dirty="0" err="1"/>
+              <a:t>anteriorpiriformcortex</a:t>
+            </a:r>
+            <a:r>
+              <a:rPr lang="en-US" dirty="0"/>
+              <a:t>(</a:t>
+            </a:r>
+            <a:r>
+              <a:rPr lang="en-US" dirty="0" err="1"/>
+              <a:t>aPCx</a:t>
+            </a:r>
+            <a:r>
+              <a:rPr lang="en-US" dirty="0"/>
+              <a:t>)</a:t>
+            </a:r>
+            <a:r>
+              <a:rPr lang="en-US" dirty="0" err="1"/>
+              <a:t>withachroniccranialwindowimplantedabovethe</a:t>
+            </a:r>
+            <a:r>
+              <a:rPr lang="en-US" dirty="0"/>
+              <a:t> </a:t>
+            </a:r>
+            <a:r>
+              <a:rPr lang="en-US" dirty="0" err="1"/>
+              <a:t>olfactorybulb</a:t>
+            </a:r>
+            <a:endParaRPr lang="en-US" dirty="0"/>
+          </a:p>
+          <a:p>
+            <a:endParaRPr lang="en-US" dirty="0"/>
+          </a:p>
+          <a:p>
+            <a:r>
+              <a:rPr lang="en-US" dirty="0">
+                <a:latin typeface="Bahnschrift" panose="020B0502040204020203" pitchFamily="34" charset="0"/>
+              </a:rPr>
+              <a:t>Piriform </a:t>
+            </a:r>
+            <a:r>
+              <a:rPr lang="en-US" dirty="0" err="1">
+                <a:latin typeface="Bahnschrift" panose="020B0502040204020203" pitchFamily="34" charset="0"/>
+              </a:rPr>
+              <a:t>efferents</a:t>
+            </a:r>
+            <a:r>
+              <a:rPr lang="en-US" dirty="0">
+                <a:latin typeface="Bahnschrift" panose="020B0502040204020203" pitchFamily="34" charset="0"/>
+              </a:rPr>
+              <a:t> labelled</a:t>
+            </a:r>
+          </a:p>
+          <a:p>
+            <a:r>
+              <a:rPr lang="en-US" dirty="0">
+                <a:latin typeface="Bahnschrift" panose="020B0502040204020203" pitchFamily="34" charset="0"/>
+              </a:rPr>
+              <a:t>Do axonal boutons in OB encode cue reversal?</a:t>
+            </a:r>
+          </a:p>
+          <a:p>
+            <a:endParaRPr lang="en-US" dirty="0">
+              <a:latin typeface="Bahnschrift" panose="020B0502040204020203" pitchFamily="34" charset="0"/>
+            </a:endParaRPr>
+          </a:p>
+          <a:p>
+            <a:endParaRPr lang="en-US" dirty="0"/>
+          </a:p>
+        </p:txBody>
+      </p:sp>
+      <p:sp>
+        <p:nvSpPr>
+          <p:cNvPr id="4" name="Slide Number Placeholder 3"/>
+          <p:cNvSpPr>
+            <a:spLocks noGrp="1"/>
+          </p:cNvSpPr>
+          <p:nvPr>
+            <p:ph type="sldNum" sz="quarter" idx="5"/>
+          </p:nvPr>
+        </p:nvSpPr>
+        <p:spPr/>
+        <p:txBody>
+          <a:bodyPr/>
+          <a:lstStyle/>
+          <a:p>
+            <a:fld id="{B747A4E7-60C9-462D-82EF-3B8321F757EB}" type="slidenum">
+              <a:rPr lang="en-US" smtClean="0"/>
+              <a:t>6</a:t>
+            </a:fld>
+            <a:endParaRPr lang="en-US"/>
+          </a:p>
+        </p:txBody>
+      </p:sp>
+    </p:spTree>
+    <p:extLst>
+      <p:ext uri="{BB962C8B-B14F-4D97-AF65-F5344CB8AC3E}">
+        <p14:creationId xmlns:p14="http://schemas.microsoft.com/office/powerpoint/2010/main" val="2802273855"/>
+      </p:ext>
+    </p:extLst>
+  </p:cSld>
+  <p:clrMapOvr>
+    <a:masterClrMapping/>
+  </p:clrMapOvr>
+</p:notes>
+</file>
+
+<file path=ppt/notesSlides/notesSlide2.xml><?xml version="1.0" encoding="utf-8"?>
+<p:notes xmlns:a="http://schemas.openxmlformats.org/drawingml/2006/main" xmlns:r="http://schemas.openxmlformats.org/officeDocument/2006/relationships" xmlns:p="http://schemas.openxmlformats.org/presentationml/2006/main">
+  <p:cSld>
+    <p:spTree>
+      <p:nvGrpSpPr>
+        <p:cNvPr id="1" name="">
+          <a:extLst>
+            <a:ext uri="{FF2B5EF4-FFF2-40B4-BE49-F238E27FC236}">
+              <a16:creationId xmlns:a16="http://schemas.microsoft.com/office/drawing/2014/main" id="{2ABDDDAD-22F0-1935-C0B7-78DB92F332FA}"/>
+            </a:ext>
+          </a:extLst>
+        </p:cNvPr>
+        <p:cNvGrpSpPr/>
+        <p:nvPr/>
+      </p:nvGrpSpPr>
+      <p:grpSpPr>
+        <a:xfrm>
+          <a:off x="0" y="0"/>
+          <a:ext cx="0" cy="0"/>
+          <a:chOff x="0" y="0"/>
+          <a:chExt cx="0" cy="0"/>
+        </a:xfrm>
+      </p:grpSpPr>
+      <p:sp>
+        <p:nvSpPr>
+          <p:cNvPr id="2" name="Slide Image Placeholder 1">
+            <a:extLst>
+              <a:ext uri="{FF2B5EF4-FFF2-40B4-BE49-F238E27FC236}">
+                <a16:creationId xmlns:a16="http://schemas.microsoft.com/office/drawing/2014/main" id="{FF2791C1-4062-1408-5C82-45CCB5C1D45D}"/>
+              </a:ext>
+            </a:extLst>
+          </p:cNvPr>
+          <p:cNvSpPr>
+            <a:spLocks noGrp="1" noRot="1" noChangeAspect="1"/>
+          </p:cNvSpPr>
+          <p:nvPr>
+            <p:ph type="sldImg"/>
+          </p:nvPr>
+        </p:nvSpPr>
+        <p:spPr/>
+      </p:sp>
+      <p:sp>
+        <p:nvSpPr>
+          <p:cNvPr id="3" name="Notes Placeholder 2">
+            <a:extLst>
+              <a:ext uri="{FF2B5EF4-FFF2-40B4-BE49-F238E27FC236}">
+                <a16:creationId xmlns:a16="http://schemas.microsoft.com/office/drawing/2014/main" id="{1633204F-14A7-52B1-A314-6EB46C294396}"/>
+              </a:ext>
+            </a:extLst>
+          </p:cNvPr>
+          <p:cNvSpPr>
+            <a:spLocks noGrp="1"/>
+          </p:cNvSpPr>
+          <p:nvPr>
+            <p:ph type="body" idx="1"/>
+          </p:nvPr>
+        </p:nvSpPr>
+        <p:spPr/>
+        <p:txBody>
+          <a:bodyPr/>
+          <a:lstStyle/>
+          <a:p>
+            <a:r>
+              <a:rPr lang="en-US" dirty="0"/>
+              <a:t>MicevirallyexpressingGCaMP5inthe </a:t>
+            </a:r>
+            <a:r>
+              <a:rPr lang="en-US" dirty="0" err="1"/>
+              <a:t>anteriorpiriformcortex</a:t>
+            </a:r>
+            <a:r>
+              <a:rPr lang="en-US" dirty="0"/>
+              <a:t>(</a:t>
+            </a:r>
+            <a:r>
+              <a:rPr lang="en-US" dirty="0" err="1"/>
+              <a:t>aPCx</a:t>
+            </a:r>
+            <a:r>
+              <a:rPr lang="en-US" dirty="0"/>
+              <a:t>)</a:t>
+            </a:r>
+            <a:r>
+              <a:rPr lang="en-US" dirty="0" err="1"/>
+              <a:t>withachroniccranialwindowimplantedabovethe</a:t>
+            </a:r>
+            <a:r>
+              <a:rPr lang="en-US" dirty="0"/>
+              <a:t> </a:t>
+            </a:r>
+            <a:r>
+              <a:rPr lang="en-US" dirty="0" err="1"/>
+              <a:t>olfactorybulb</a:t>
+            </a:r>
+            <a:endParaRPr lang="en-US" dirty="0"/>
+          </a:p>
+          <a:p>
+            <a:endParaRPr lang="en-US" dirty="0"/>
+          </a:p>
+          <a:p>
+            <a:r>
+              <a:rPr lang="en-US" dirty="0">
+                <a:latin typeface="Bahnschrift" panose="020B0502040204020203" pitchFamily="34" charset="0"/>
+              </a:rPr>
+              <a:t>Piriform </a:t>
+            </a:r>
+            <a:r>
+              <a:rPr lang="en-US" dirty="0" err="1">
+                <a:latin typeface="Bahnschrift" panose="020B0502040204020203" pitchFamily="34" charset="0"/>
+              </a:rPr>
+              <a:t>efferents</a:t>
+            </a:r>
+            <a:r>
+              <a:rPr lang="en-US" dirty="0">
+                <a:latin typeface="Bahnschrift" panose="020B0502040204020203" pitchFamily="34" charset="0"/>
+              </a:rPr>
+              <a:t> labelled</a:t>
+            </a:r>
+          </a:p>
+          <a:p>
+            <a:r>
+              <a:rPr lang="en-US" dirty="0">
+                <a:latin typeface="Bahnschrift" panose="020B0502040204020203" pitchFamily="34" charset="0"/>
+              </a:rPr>
+              <a:t>Do axonal boutons in OB encode cue reversal?</a:t>
+            </a:r>
+          </a:p>
+          <a:p>
+            <a:endParaRPr lang="en-US" dirty="0">
+              <a:latin typeface="Bahnschrift" panose="020B0502040204020203" pitchFamily="34" charset="0"/>
+            </a:endParaRPr>
+          </a:p>
+          <a:p>
+            <a:endParaRPr lang="en-US" dirty="0"/>
+          </a:p>
+        </p:txBody>
+      </p:sp>
+      <p:sp>
+        <p:nvSpPr>
+          <p:cNvPr id="4" name="Slide Number Placeholder 3">
+            <a:extLst>
+              <a:ext uri="{FF2B5EF4-FFF2-40B4-BE49-F238E27FC236}">
+                <a16:creationId xmlns:a16="http://schemas.microsoft.com/office/drawing/2014/main" id="{8EB706B3-2684-29EB-AF62-3DD7E19726F1}"/>
+              </a:ext>
+            </a:extLst>
+          </p:cNvPr>
+          <p:cNvSpPr>
+            <a:spLocks noGrp="1"/>
+          </p:cNvSpPr>
+          <p:nvPr>
+            <p:ph type="sldNum" sz="quarter" idx="5"/>
+          </p:nvPr>
+        </p:nvSpPr>
+        <p:spPr/>
+        <p:txBody>
+          <a:bodyPr/>
+          <a:lstStyle/>
+          <a:p>
+            <a:fld id="{B747A4E7-60C9-462D-82EF-3B8321F757EB}" type="slidenum">
+              <a:rPr lang="en-US" smtClean="0"/>
+              <a:t>7</a:t>
+            </a:fld>
+            <a:endParaRPr lang="en-US"/>
+          </a:p>
+        </p:txBody>
+      </p:sp>
+    </p:spTree>
+    <p:extLst>
+      <p:ext uri="{BB962C8B-B14F-4D97-AF65-F5344CB8AC3E}">
+        <p14:creationId xmlns:p14="http://schemas.microsoft.com/office/powerpoint/2010/main" val="137766761"/>
+      </p:ext>
+    </p:extLst>
+  </p:cSld>
+  <p:clrMapOvr>
+    <a:masterClrMapping/>
+  </p:clrMapOvr>
+</p:notes>
+</file>
+
+<file path=ppt/notesSlides/notesSlide3.xml><?xml version="1.0" encoding="utf-8"?>
+<p:notes xmlns:a="http://schemas.openxmlformats.org/drawingml/2006/main" xmlns:r="http://schemas.openxmlformats.org/officeDocument/2006/relationships" xmlns:p="http://schemas.openxmlformats.org/presentationml/2006/main">
+  <p:cSld>
+    <p:spTree>
+      <p:nvGrpSpPr>
+        <p:cNvPr id="1" name=""/>
+        <p:cNvGrpSpPr/>
+        <p:nvPr/>
+      </p:nvGrpSpPr>
+      <p:grpSpPr>
+        <a:xfrm>
+          <a:off x="0" y="0"/>
+          <a:ext cx="0" cy="0"/>
+          <a:chOff x="0" y="0"/>
+          <a:chExt cx="0" cy="0"/>
+        </a:xfrm>
+      </p:grpSpPr>
+      <p:sp>
+        <p:nvSpPr>
+          <p:cNvPr id="2" name="Slide Image Placeholder 1"/>
+          <p:cNvSpPr>
+            <a:spLocks noGrp="1" noRot="1" noChangeAspect="1"/>
+          </p:cNvSpPr>
+          <p:nvPr>
+            <p:ph type="sldImg"/>
+          </p:nvPr>
+        </p:nvSpPr>
+        <p:spPr/>
+      </p:sp>
+      <p:sp>
+        <p:nvSpPr>
+          <p:cNvPr id="3" name="Notes Placeholder 2"/>
+          <p:cNvSpPr>
+            <a:spLocks noGrp="1"/>
+          </p:cNvSpPr>
+          <p:nvPr>
+            <p:ph type="body" idx="1"/>
+          </p:nvPr>
+        </p:nvSpPr>
+        <p:spPr/>
+        <p:txBody>
+          <a:bodyPr/>
+          <a:lstStyle/>
+          <a:p>
+            <a:r>
+              <a:rPr lang="en-US" dirty="0"/>
+              <a:t>Which mice are these? Were they completely naïve or just naïve to this version of the task?</a:t>
+            </a:r>
+          </a:p>
+        </p:txBody>
+      </p:sp>
+      <p:sp>
+        <p:nvSpPr>
+          <p:cNvPr id="4" name="Slide Number Placeholder 3"/>
+          <p:cNvSpPr>
+            <a:spLocks noGrp="1"/>
+          </p:cNvSpPr>
+          <p:nvPr>
+            <p:ph type="sldNum" sz="quarter" idx="5"/>
+          </p:nvPr>
+        </p:nvSpPr>
+        <p:spPr/>
+        <p:txBody>
+          <a:bodyPr/>
+          <a:lstStyle/>
+          <a:p>
+            <a:fld id="{B747A4E7-60C9-462D-82EF-3B8321F757EB}" type="slidenum">
+              <a:rPr lang="en-US" smtClean="0"/>
+              <a:t>18</a:t>
+            </a:fld>
+            <a:endParaRPr lang="en-US"/>
+          </a:p>
+        </p:txBody>
+      </p:sp>
+    </p:spTree>
+    <p:extLst>
+      <p:ext uri="{BB962C8B-B14F-4D97-AF65-F5344CB8AC3E}">
+        <p14:creationId xmlns:p14="http://schemas.microsoft.com/office/powerpoint/2010/main" val="2875278371"/>
+      </p:ext>
+    </p:extLst>
+  </p:cSld>
+  <p:clrMapOvr>
+    <a:masterClrMapping/>
+  </p:clrMapOvr>
+</p:notes>
+</file>
+
+<file path=ppt/notesSlides/notesSlide4.xml><?xml version="1.0" encoding="utf-8"?>
+<p:notes xmlns:a="http://schemas.openxmlformats.org/drawingml/2006/main" xmlns:r="http://schemas.openxmlformats.org/officeDocument/2006/relationships" xmlns:p="http://schemas.openxmlformats.org/presentationml/2006/main">
+  <p:cSld>
+    <p:spTree>
+      <p:nvGrpSpPr>
+        <p:cNvPr id="1" name="">
+          <a:extLst>
+            <a:ext uri="{FF2B5EF4-FFF2-40B4-BE49-F238E27FC236}">
+              <a16:creationId xmlns:a16="http://schemas.microsoft.com/office/drawing/2014/main" id="{7BF851A9-2030-A346-A04A-65011ACA843C}"/>
+            </a:ext>
+          </a:extLst>
+        </p:cNvPr>
+        <p:cNvGrpSpPr/>
+        <p:nvPr/>
+      </p:nvGrpSpPr>
+      <p:grpSpPr>
+        <a:xfrm>
+          <a:off x="0" y="0"/>
+          <a:ext cx="0" cy="0"/>
+          <a:chOff x="0" y="0"/>
+          <a:chExt cx="0" cy="0"/>
+        </a:xfrm>
+      </p:grpSpPr>
+      <p:sp>
+        <p:nvSpPr>
+          <p:cNvPr id="2" name="Slide Image Placeholder 1">
+            <a:extLst>
+              <a:ext uri="{FF2B5EF4-FFF2-40B4-BE49-F238E27FC236}">
+                <a16:creationId xmlns:a16="http://schemas.microsoft.com/office/drawing/2014/main" id="{B4FB10FB-A489-68A6-8070-BE6F13E01D15}"/>
+              </a:ext>
+            </a:extLst>
+          </p:cNvPr>
+          <p:cNvSpPr>
+            <a:spLocks noGrp="1" noRot="1" noChangeAspect="1"/>
+          </p:cNvSpPr>
+          <p:nvPr>
+            <p:ph type="sldImg"/>
+          </p:nvPr>
+        </p:nvSpPr>
+        <p:spPr/>
+      </p:sp>
+      <p:sp>
+        <p:nvSpPr>
+          <p:cNvPr id="3" name="Notes Placeholder 2">
+            <a:extLst>
+              <a:ext uri="{FF2B5EF4-FFF2-40B4-BE49-F238E27FC236}">
+                <a16:creationId xmlns:a16="http://schemas.microsoft.com/office/drawing/2014/main" id="{3DD16C9C-CDA2-D935-4CF6-6651A057DD76}"/>
+              </a:ext>
+            </a:extLst>
+          </p:cNvPr>
+          <p:cNvSpPr>
+            <a:spLocks noGrp="1"/>
+          </p:cNvSpPr>
+          <p:nvPr>
+            <p:ph type="body" idx="1"/>
+          </p:nvPr>
+        </p:nvSpPr>
+        <p:spPr/>
+        <p:txBody>
+          <a:bodyPr/>
+          <a:lstStyle/>
+          <a:p>
+            <a:r>
+              <a:rPr lang="en-US" dirty="0"/>
+              <a:t>a Example bouton responses during block transitions sampled throughout the ‘delay </a:t>
+            </a:r>
+            <a:r>
+              <a:rPr lang="en-US" dirty="0" err="1"/>
+              <a:t>period’fromonefieldofviewinanexpertmouse</a:t>
+            </a:r>
+            <a:r>
+              <a:rPr lang="en-US" dirty="0"/>
+              <a:t>.(Top)</a:t>
+            </a:r>
+            <a:r>
+              <a:rPr lang="en-US" dirty="0" err="1"/>
+              <a:t>Odortrials</a:t>
+            </a:r>
+            <a:r>
+              <a:rPr lang="en-US" dirty="0"/>
+              <a:t>.(Bottom) </a:t>
+            </a:r>
+            <a:r>
+              <a:rPr lang="en-US" dirty="0" err="1"/>
+              <a:t>Soundtrials.Graybarsmarkthetrialoutcome</a:t>
+            </a:r>
+            <a:r>
+              <a:rPr lang="en-US" dirty="0"/>
+              <a:t>(correct–</a:t>
+            </a:r>
+            <a:r>
+              <a:rPr lang="en-US" dirty="0" err="1"/>
+              <a:t>lightgray;incorrect</a:t>
+            </a:r>
+            <a:r>
+              <a:rPr lang="en-US" dirty="0"/>
+              <a:t>–dark gray).</a:t>
+            </a:r>
+          </a:p>
+        </p:txBody>
+      </p:sp>
+      <p:sp>
+        <p:nvSpPr>
+          <p:cNvPr id="4" name="Slide Number Placeholder 3">
+            <a:extLst>
+              <a:ext uri="{FF2B5EF4-FFF2-40B4-BE49-F238E27FC236}">
+                <a16:creationId xmlns:a16="http://schemas.microsoft.com/office/drawing/2014/main" id="{1A7E41EA-4A2A-CB13-208C-8BA51BC6ECDE}"/>
+              </a:ext>
+            </a:extLst>
+          </p:cNvPr>
+          <p:cNvSpPr>
+            <a:spLocks noGrp="1"/>
+          </p:cNvSpPr>
+          <p:nvPr>
+            <p:ph type="sldNum" sz="quarter" idx="5"/>
+          </p:nvPr>
+        </p:nvSpPr>
+        <p:spPr/>
+        <p:txBody>
+          <a:bodyPr/>
+          <a:lstStyle/>
+          <a:p>
+            <a:fld id="{B747A4E7-60C9-462D-82EF-3B8321F757EB}" type="slidenum">
+              <a:rPr lang="en-US" smtClean="0"/>
+              <a:t>20</a:t>
+            </a:fld>
+            <a:endParaRPr lang="en-US"/>
+          </a:p>
+        </p:txBody>
+      </p:sp>
+    </p:spTree>
+    <p:extLst>
+      <p:ext uri="{BB962C8B-B14F-4D97-AF65-F5344CB8AC3E}">
+        <p14:creationId xmlns:p14="http://schemas.microsoft.com/office/powerpoint/2010/main" val="1752362251"/>
+      </p:ext>
+    </p:extLst>
+  </p:cSld>
+  <p:clrMapOvr>
+    <a:masterClrMapping/>
+  </p:clrMapOvr>
+</p:notes>
+</file>
+
+<file path=ppt/notesSlides/notesSlide5.xml><?xml version="1.0" encoding="utf-8"?>
+<p:notes xmlns:a="http://schemas.openxmlformats.org/drawingml/2006/main" xmlns:r="http://schemas.openxmlformats.org/officeDocument/2006/relationships" xmlns:p="http://schemas.openxmlformats.org/presentationml/2006/main">
+  <p:cSld>
+    <p:spTree>
+      <p:nvGrpSpPr>
+        <p:cNvPr id="1" name="">
+          <a:extLst>
+            <a:ext uri="{FF2B5EF4-FFF2-40B4-BE49-F238E27FC236}">
+              <a16:creationId xmlns:a16="http://schemas.microsoft.com/office/drawing/2014/main" id="{F0801A68-1B65-227B-8CCB-651A284D718D}"/>
+            </a:ext>
+          </a:extLst>
+        </p:cNvPr>
+        <p:cNvGrpSpPr/>
+        <p:nvPr/>
+      </p:nvGrpSpPr>
+      <p:grpSpPr>
+        <a:xfrm>
+          <a:off x="0" y="0"/>
+          <a:ext cx="0" cy="0"/>
+          <a:chOff x="0" y="0"/>
+          <a:chExt cx="0" cy="0"/>
+        </a:xfrm>
+      </p:grpSpPr>
+      <p:sp>
+        <p:nvSpPr>
+          <p:cNvPr id="2" name="Slide Image Placeholder 1">
+            <a:extLst>
+              <a:ext uri="{FF2B5EF4-FFF2-40B4-BE49-F238E27FC236}">
+                <a16:creationId xmlns:a16="http://schemas.microsoft.com/office/drawing/2014/main" id="{99F6B5D4-1857-4382-3154-651F7E0351FC}"/>
+              </a:ext>
+            </a:extLst>
+          </p:cNvPr>
+          <p:cNvSpPr>
+            <a:spLocks noGrp="1" noRot="1" noChangeAspect="1"/>
+          </p:cNvSpPr>
+          <p:nvPr>
+            <p:ph type="sldImg"/>
+          </p:nvPr>
+        </p:nvSpPr>
+        <p:spPr/>
+      </p:sp>
+      <p:sp>
+        <p:nvSpPr>
+          <p:cNvPr id="3" name="Notes Placeholder 2">
+            <a:extLst>
+              <a:ext uri="{FF2B5EF4-FFF2-40B4-BE49-F238E27FC236}">
+                <a16:creationId xmlns:a16="http://schemas.microsoft.com/office/drawing/2014/main" id="{6E0ADA94-BF69-0FC1-34F0-9E622E895DEA}"/>
+              </a:ext>
+            </a:extLst>
+          </p:cNvPr>
+          <p:cNvSpPr>
+            <a:spLocks noGrp="1"/>
+          </p:cNvSpPr>
+          <p:nvPr>
+            <p:ph type="body" idx="1"/>
+          </p:nvPr>
+        </p:nvSpPr>
+        <p:spPr/>
+        <p:txBody>
+          <a:bodyPr/>
+          <a:lstStyle/>
+          <a:p>
+            <a:r>
+              <a:rPr lang="en-US" dirty="0"/>
+              <a:t>a Example bouton responses during block transitions sampled throughout the ‘delay </a:t>
+            </a:r>
+            <a:r>
+              <a:rPr lang="en-US" dirty="0" err="1"/>
+              <a:t>period’fromonefieldofviewinanexpertmouse</a:t>
+            </a:r>
+            <a:r>
+              <a:rPr lang="en-US" dirty="0"/>
+              <a:t>.(Top)</a:t>
+            </a:r>
+            <a:r>
+              <a:rPr lang="en-US" dirty="0" err="1"/>
+              <a:t>Odortrials</a:t>
+            </a:r>
+            <a:r>
+              <a:rPr lang="en-US" dirty="0"/>
+              <a:t>.(Bottom) </a:t>
+            </a:r>
+            <a:r>
+              <a:rPr lang="en-US" dirty="0" err="1"/>
+              <a:t>Soundtrials.Graybarsmarkthetrialoutcome</a:t>
+            </a:r>
+            <a:r>
+              <a:rPr lang="en-US" dirty="0"/>
+              <a:t>(correct–</a:t>
+            </a:r>
+            <a:r>
+              <a:rPr lang="en-US" dirty="0" err="1"/>
+              <a:t>lightgray;incorrect</a:t>
+            </a:r>
+            <a:r>
+              <a:rPr lang="en-US" dirty="0"/>
+              <a:t>–dark gray).</a:t>
+            </a:r>
+          </a:p>
+        </p:txBody>
+      </p:sp>
+      <p:sp>
+        <p:nvSpPr>
+          <p:cNvPr id="4" name="Slide Number Placeholder 3">
+            <a:extLst>
+              <a:ext uri="{FF2B5EF4-FFF2-40B4-BE49-F238E27FC236}">
+                <a16:creationId xmlns:a16="http://schemas.microsoft.com/office/drawing/2014/main" id="{614EA3C1-70AB-53D1-0F4A-7C873693719D}"/>
+              </a:ext>
+            </a:extLst>
+          </p:cNvPr>
+          <p:cNvSpPr>
+            <a:spLocks noGrp="1"/>
+          </p:cNvSpPr>
+          <p:nvPr>
+            <p:ph type="sldNum" sz="quarter" idx="5"/>
+          </p:nvPr>
+        </p:nvSpPr>
+        <p:spPr/>
+        <p:txBody>
+          <a:bodyPr/>
+          <a:lstStyle/>
+          <a:p>
+            <a:fld id="{B747A4E7-60C9-462D-82EF-3B8321F757EB}" type="slidenum">
+              <a:rPr lang="en-US" smtClean="0"/>
+              <a:t>21</a:t>
+            </a:fld>
+            <a:endParaRPr lang="en-US"/>
+          </a:p>
+        </p:txBody>
+      </p:sp>
+    </p:spTree>
+    <p:extLst>
+      <p:ext uri="{BB962C8B-B14F-4D97-AF65-F5344CB8AC3E}">
+        <p14:creationId xmlns:p14="http://schemas.microsoft.com/office/powerpoint/2010/main" val="2083314959"/>
+      </p:ext>
+    </p:extLst>
+  </p:cSld>
+  <p:clrMapOvr>
+    <a:masterClrMapping/>
+  </p:clrMapOvr>
+</p:notes>
 </file>
 
 <file path=ppt/slideLayouts/slideLayout1.xml><?xml version="1.0" encoding="utf-8"?>
@@ -266,7 +1338,7 @@
           <a:p>
             <a:fld id="{2FAC3415-25B7-48DA-858B-AD0E1A16588B}" type="datetimeFigureOut">
               <a:rPr lang="en-US" smtClean="0"/>
-              <a:t>4/13/2026</a:t>
+              <a:t>4/14/2026</a:t>
             </a:fld>
             <a:endParaRPr lang="en-US"/>
           </a:p>
@@ -464,7 +1536,7 @@
           <a:p>
             <a:fld id="{2FAC3415-25B7-48DA-858B-AD0E1A16588B}" type="datetimeFigureOut">
               <a:rPr lang="en-US" smtClean="0"/>
-              <a:t>4/13/2026</a:t>
+              <a:t>4/14/2026</a:t>
             </a:fld>
             <a:endParaRPr lang="en-US"/>
           </a:p>
@@ -672,7 +1744,7 @@
           <a:p>
             <a:fld id="{2FAC3415-25B7-48DA-858B-AD0E1A16588B}" type="datetimeFigureOut">
               <a:rPr lang="en-US" smtClean="0"/>
-              <a:t>4/13/2026</a:t>
+              <a:t>4/14/2026</a:t>
             </a:fld>
             <a:endParaRPr lang="en-US"/>
           </a:p>
@@ -870,7 +1942,7 @@
           <a:p>
             <a:fld id="{2FAC3415-25B7-48DA-858B-AD0E1A16588B}" type="datetimeFigureOut">
               <a:rPr lang="en-US" smtClean="0"/>
-              <a:t>4/13/2026</a:t>
+              <a:t>4/14/2026</a:t>
             </a:fld>
             <a:endParaRPr lang="en-US"/>
           </a:p>
@@ -1145,7 +2217,7 @@
           <a:p>
             <a:fld id="{2FAC3415-25B7-48DA-858B-AD0E1A16588B}" type="datetimeFigureOut">
               <a:rPr lang="en-US" smtClean="0"/>
-              <a:t>4/13/2026</a:t>
+              <a:t>4/14/2026</a:t>
             </a:fld>
             <a:endParaRPr lang="en-US"/>
           </a:p>
@@ -1410,7 +2482,7 @@
           <a:p>
             <a:fld id="{2FAC3415-25B7-48DA-858B-AD0E1A16588B}" type="datetimeFigureOut">
               <a:rPr lang="en-US" smtClean="0"/>
-              <a:t>4/13/2026</a:t>
+              <a:t>4/14/2026</a:t>
             </a:fld>
             <a:endParaRPr lang="en-US"/>
           </a:p>
@@ -1822,7 +2894,7 @@
           <a:p>
             <a:fld id="{2FAC3415-25B7-48DA-858B-AD0E1A16588B}" type="datetimeFigureOut">
               <a:rPr lang="en-US" smtClean="0"/>
-              <a:t>4/13/2026</a:t>
+              <a:t>4/14/2026</a:t>
             </a:fld>
             <a:endParaRPr lang="en-US"/>
           </a:p>
@@ -1963,7 +3035,7 @@
           <a:p>
             <a:fld id="{2FAC3415-25B7-48DA-858B-AD0E1A16588B}" type="datetimeFigureOut">
               <a:rPr lang="en-US" smtClean="0"/>
-              <a:t>4/13/2026</a:t>
+              <a:t>4/14/2026</a:t>
             </a:fld>
             <a:endParaRPr lang="en-US"/>
           </a:p>
@@ -2076,7 +3148,7 @@
           <a:p>
             <a:fld id="{2FAC3415-25B7-48DA-858B-AD0E1A16588B}" type="datetimeFigureOut">
               <a:rPr lang="en-US" smtClean="0"/>
-              <a:t>4/13/2026</a:t>
+              <a:t>4/14/2026</a:t>
             </a:fld>
             <a:endParaRPr lang="en-US"/>
           </a:p>
@@ -2387,7 +3459,7 @@
           <a:p>
             <a:fld id="{2FAC3415-25B7-48DA-858B-AD0E1A16588B}" type="datetimeFigureOut">
               <a:rPr lang="en-US" smtClean="0"/>
-              <a:t>4/13/2026</a:t>
+              <a:t>4/14/2026</a:t>
             </a:fld>
             <a:endParaRPr lang="en-US"/>
           </a:p>
@@ -2675,7 +3747,7 @@
           <a:p>
             <a:fld id="{2FAC3415-25B7-48DA-858B-AD0E1A16588B}" type="datetimeFigureOut">
               <a:rPr lang="en-US" smtClean="0"/>
-              <a:t>4/13/2026</a:t>
+              <a:t>4/14/2026</a:t>
             </a:fld>
             <a:endParaRPr lang="en-US"/>
           </a:p>
@@ -2916,7 +3988,7 @@
           <a:p>
             <a:fld id="{2FAC3415-25B7-48DA-858B-AD0E1A16588B}" type="datetimeFigureOut">
               <a:rPr lang="en-US" smtClean="0"/>
-              <a:t>4/13/2026</a:t>
+              <a:t>4/14/2026</a:t>
             </a:fld>
             <a:endParaRPr lang="en-US"/>
           </a:p>
@@ -3370,6 +4442,13 @@
           <a:p>
             <a:r>
               <a:rPr lang="en-US" sz="4400" b="1" i="1" dirty="0">
+                <a:effectLst>
+                  <a:outerShdw blurRad="38100" dist="38100" dir="2700000" algn="tl">
+                    <a:srgbClr val="000000">
+                      <a:alpha val="43137"/>
+                    </a:srgbClr>
+                  </a:outerShdw>
+                </a:effectLst>
                 <a:latin typeface="Bahnschrift" panose="020B0502040204020203" pitchFamily="34" charset="0"/>
                 <a:cs typeface="Aharoni" panose="02010803020104030203" pitchFamily="2" charset="-79"/>
               </a:rPr>
@@ -3387,14 +4466,7 @@
                 <a:latin typeface="Bahnschrift" panose="020B0502040204020203" pitchFamily="34" charset="0"/>
                 <a:cs typeface="Aharoni" panose="02010803020104030203" pitchFamily="2" charset="-79"/>
               </a:rPr>
-              <a:t> </a:t>
-            </a:r>
-            <a:r>
-              <a:rPr lang="en-US" sz="4400" b="1" dirty="0">
-                <a:latin typeface="Bahnschrift" panose="020B0502040204020203" pitchFamily="34" charset="0"/>
-                <a:cs typeface="Aharoni" panose="02010803020104030203" pitchFamily="2" charset="-79"/>
-              </a:rPr>
-              <a:t>updating feedback from piriform cortex to the olfactory bulb relays </a:t>
+              <a:t> updating feedback from piriform cortex to the olfactory bulb relays </a:t>
             </a:r>
             <a:r>
               <a:rPr lang="en-US" sz="4400" b="1" i="0" dirty="0">
@@ -3558,6 +4630,13 @@
             </a:r>
             <a:r>
               <a:rPr lang="en-US" sz="4400" b="1" dirty="0">
+                <a:effectLst>
+                  <a:outerShdw blurRad="38100" dist="38100" dir="2700000" algn="tl">
+                    <a:srgbClr val="000000">
+                      <a:alpha val="43137"/>
+                    </a:srgbClr>
+                  </a:outerShdw>
+                </a:effectLst>
                 <a:latin typeface="Bahnschrift" panose="020B0502040204020203" pitchFamily="34" charset="0"/>
                 <a:cs typeface="Aharoni" panose="02010803020104030203" pitchFamily="2" charset="-79"/>
               </a:rPr>
@@ -3635,6 +4714,122 @@
 </file>
 
 <file path=ppt/slides/slide10.xml><?xml version="1.0" encoding="utf-8"?>
+<p:sld xmlns:a="http://schemas.openxmlformats.org/drawingml/2006/main" xmlns:r="http://schemas.openxmlformats.org/officeDocument/2006/relationships" xmlns:p="http://schemas.openxmlformats.org/presentationml/2006/main">
+  <p:cSld>
+    <p:spTree>
+      <p:nvGrpSpPr>
+        <p:cNvPr id="1" name="">
+          <a:extLst>
+            <a:ext uri="{FF2B5EF4-FFF2-40B4-BE49-F238E27FC236}">
+              <a16:creationId xmlns:a16="http://schemas.microsoft.com/office/drawing/2014/main" id="{D62EBCC4-0441-6C14-3F97-0C53E4BCB616}"/>
+            </a:ext>
+          </a:extLst>
+        </p:cNvPr>
+        <p:cNvGrpSpPr/>
+        <p:nvPr/>
+      </p:nvGrpSpPr>
+      <p:grpSpPr>
+        <a:xfrm>
+          <a:off x="0" y="0"/>
+          <a:ext cx="0" cy="0"/>
+          <a:chOff x="0" y="0"/>
+          <a:chExt cx="0" cy="0"/>
+        </a:xfrm>
+      </p:grpSpPr>
+      <p:sp>
+        <p:nvSpPr>
+          <p:cNvPr id="2" name="Title 1">
+            <a:extLst>
+              <a:ext uri="{FF2B5EF4-FFF2-40B4-BE49-F238E27FC236}">
+                <a16:creationId xmlns:a16="http://schemas.microsoft.com/office/drawing/2014/main" id="{8291A1E2-BF84-4B75-9FCD-49D3747906EA}"/>
+              </a:ext>
+            </a:extLst>
+          </p:cNvPr>
+          <p:cNvSpPr>
+            <a:spLocks noGrp="1"/>
+          </p:cNvSpPr>
+          <p:nvPr>
+            <p:ph type="title"/>
+          </p:nvPr>
+        </p:nvSpPr>
+        <p:spPr>
+          <a:xfrm>
+            <a:off x="0" y="355981"/>
+            <a:ext cx="12192000" cy="1325563"/>
+          </a:xfrm>
+        </p:spPr>
+        <p:txBody>
+          <a:bodyPr>
+            <a:normAutofit/>
+          </a:bodyPr>
+          <a:lstStyle/>
+          <a:p>
+            <a:pPr algn="ctr"/>
+            <a:r>
+              <a:rPr lang="en-US" sz="3600" b="1" dirty="0">
+                <a:solidFill>
+                  <a:schemeClr val="tx1">
+                    <a:lumMod val="50000"/>
+                    <a:lumOff val="50000"/>
+                  </a:schemeClr>
+                </a:solidFill>
+                <a:latin typeface="Bahnschrift" panose="020B0502040204020203" pitchFamily="34" charset="0"/>
+              </a:rPr>
+              <a:t>Fast Update of Cortical Bulbar Feedback</a:t>
+            </a:r>
+          </a:p>
+        </p:txBody>
+      </p:sp>
+      <p:pic>
+        <p:nvPicPr>
+          <p:cNvPr id="5" name="Content Placeholder 6">
+            <a:extLst>
+              <a:ext uri="{FF2B5EF4-FFF2-40B4-BE49-F238E27FC236}">
+                <a16:creationId xmlns:a16="http://schemas.microsoft.com/office/drawing/2014/main" id="{F25880F6-10C7-F3F6-7843-B23055196887}"/>
+              </a:ext>
+            </a:extLst>
+          </p:cNvPr>
+          <p:cNvPicPr>
+            <a:picLocks/>
+          </p:cNvPicPr>
+          <p:nvPr/>
+        </p:nvPicPr>
+        <p:blipFill>
+          <a:blip r:embed="rId2">
+            <a:alphaModFix/>
+            <a:extLst>
+              <a:ext uri="{28A0092B-C50C-407E-A947-70E740481C1C}">
+                <a14:useLocalDpi xmlns:a14="http://schemas.microsoft.com/office/drawing/2010/main" val="0"/>
+              </a:ext>
+            </a:extLst>
+          </a:blip>
+          <a:srcRect/>
+          <a:stretch/>
+        </p:blipFill>
+        <p:spPr>
+          <a:xfrm>
+            <a:off x="1562666" y="1681544"/>
+            <a:ext cx="9066667" cy="4133333"/>
+          </a:xfrm>
+          <a:prstGeom prst="rect">
+            <a:avLst/>
+          </a:prstGeom>
+        </p:spPr>
+      </p:pic>
+    </p:spTree>
+    <p:extLst>
+      <p:ext uri="{BB962C8B-B14F-4D97-AF65-F5344CB8AC3E}">
+        <p14:creationId xmlns:p14="http://schemas.microsoft.com/office/powerpoint/2010/main" val="27161434"/>
+      </p:ext>
+    </p:extLst>
+  </p:cSld>
+  <p:clrMapOvr>
+    <a:masterClrMapping/>
+  </p:clrMapOvr>
+</p:sld>
+</file>
+
+<file path=ppt/slides/slide11.xml><?xml version="1.0" encoding="utf-8"?>
 <p:sld xmlns:a="http://schemas.openxmlformats.org/drawingml/2006/main" xmlns:r="http://schemas.openxmlformats.org/officeDocument/2006/relationships" xmlns:p="http://schemas.openxmlformats.org/presentationml/2006/main">
   <p:cSld>
     <p:spTree>
@@ -3750,7 +4945,7 @@
 </p:sld>
 </file>
 
-<file path=ppt/slides/slide11.xml><?xml version="1.0" encoding="utf-8"?>
+<file path=ppt/slides/slide12.xml><?xml version="1.0" encoding="utf-8"?>
 <p:sld xmlns:a="http://schemas.openxmlformats.org/drawingml/2006/main" xmlns:r="http://schemas.openxmlformats.org/officeDocument/2006/relationships" xmlns:p="http://schemas.openxmlformats.org/presentationml/2006/main">
   <p:cSld>
     <p:spTree>
@@ -3866,7 +5061,7 @@
 </p:sld>
 </file>
 
-<file path=ppt/slides/slide12.xml><?xml version="1.0" encoding="utf-8"?>
+<file path=ppt/slides/slide13.xml><?xml version="1.0" encoding="utf-8"?>
 <p:sld xmlns:a="http://schemas.openxmlformats.org/drawingml/2006/main" xmlns:r="http://schemas.openxmlformats.org/officeDocument/2006/relationships" xmlns:p="http://schemas.openxmlformats.org/presentationml/2006/main">
   <p:cSld>
     <p:spTree>
@@ -3982,7 +5177,7 @@
 </p:sld>
 </file>
 
-<file path=ppt/slides/slide13.xml><?xml version="1.0" encoding="utf-8"?>
+<file path=ppt/slides/slide14.xml><?xml version="1.0" encoding="utf-8"?>
 <p:sld xmlns:a="http://schemas.openxmlformats.org/drawingml/2006/main" xmlns:r="http://schemas.openxmlformats.org/officeDocument/2006/relationships" xmlns:p="http://schemas.openxmlformats.org/presentationml/2006/main">
   <p:cSld>
     <p:spTree>
@@ -4089,6 +5284,526 @@
     <p:extLst>
       <p:ext uri="{BB962C8B-B14F-4D97-AF65-F5344CB8AC3E}">
         <p14:creationId xmlns:p14="http://schemas.microsoft.com/office/powerpoint/2010/main" val="1545629575"/>
+      </p:ext>
+    </p:extLst>
+  </p:cSld>
+  <p:clrMapOvr>
+    <a:masterClrMapping/>
+  </p:clrMapOvr>
+</p:sld>
+</file>
+
+<file path=ppt/slides/slide15.xml><?xml version="1.0" encoding="utf-8"?>
+<p:sld xmlns:a="http://schemas.openxmlformats.org/drawingml/2006/main" xmlns:r="http://schemas.openxmlformats.org/officeDocument/2006/relationships" xmlns:p="http://schemas.openxmlformats.org/presentationml/2006/main">
+  <p:cSld>
+    <p:spTree>
+      <p:nvGrpSpPr>
+        <p:cNvPr id="1" name="">
+          <a:extLst>
+            <a:ext uri="{FF2B5EF4-FFF2-40B4-BE49-F238E27FC236}">
+              <a16:creationId xmlns:a16="http://schemas.microsoft.com/office/drawing/2014/main" id="{86EE87D7-21F7-4FC4-8360-B8481E8CA665}"/>
+            </a:ext>
+          </a:extLst>
+        </p:cNvPr>
+        <p:cNvGrpSpPr/>
+        <p:nvPr/>
+      </p:nvGrpSpPr>
+      <p:grpSpPr>
+        <a:xfrm>
+          <a:off x="0" y="0"/>
+          <a:ext cx="0" cy="0"/>
+          <a:chOff x="0" y="0"/>
+          <a:chExt cx="0" cy="0"/>
+        </a:xfrm>
+      </p:grpSpPr>
+      <p:sp>
+        <p:nvSpPr>
+          <p:cNvPr id="2" name="Title 1">
+            <a:extLst>
+              <a:ext uri="{FF2B5EF4-FFF2-40B4-BE49-F238E27FC236}">
+                <a16:creationId xmlns:a16="http://schemas.microsoft.com/office/drawing/2014/main" id="{E7A8C8BF-4754-8FA4-7E5A-8A2AEE659CEA}"/>
+              </a:ext>
+            </a:extLst>
+          </p:cNvPr>
+          <p:cNvSpPr>
+            <a:spLocks noGrp="1"/>
+          </p:cNvSpPr>
+          <p:nvPr>
+            <p:ph type="title"/>
+          </p:nvPr>
+        </p:nvSpPr>
+        <p:spPr>
+          <a:xfrm>
+            <a:off x="0" y="2766218"/>
+            <a:ext cx="12192000" cy="1325563"/>
+          </a:xfrm>
+        </p:spPr>
+        <p:txBody>
+          <a:bodyPr>
+            <a:normAutofit/>
+          </a:bodyPr>
+          <a:lstStyle/>
+          <a:p>
+            <a:pPr algn="ctr"/>
+            <a:r>
+              <a:rPr lang="en-US" sz="5400" b="1" dirty="0">
+                <a:solidFill>
+                  <a:schemeClr val="tx1">
+                    <a:lumMod val="50000"/>
+                    <a:lumOff val="50000"/>
+                  </a:schemeClr>
+                </a:solidFill>
+                <a:latin typeface="Bahnschrift" panose="020B0502040204020203" pitchFamily="34" charset="0"/>
+              </a:rPr>
+              <a:t>Brief Detour</a:t>
+            </a:r>
+          </a:p>
+        </p:txBody>
+      </p:sp>
+    </p:spTree>
+    <p:extLst>
+      <p:ext uri="{BB962C8B-B14F-4D97-AF65-F5344CB8AC3E}">
+        <p14:creationId xmlns:p14="http://schemas.microsoft.com/office/powerpoint/2010/main" val="3351440135"/>
+      </p:ext>
+    </p:extLst>
+  </p:cSld>
+  <p:clrMapOvr>
+    <a:masterClrMapping/>
+  </p:clrMapOvr>
+</p:sld>
+</file>
+
+<file path=ppt/slides/slide16.xml><?xml version="1.0" encoding="utf-8"?>
+<p:sld xmlns:a="http://schemas.openxmlformats.org/drawingml/2006/main" xmlns:r="http://schemas.openxmlformats.org/officeDocument/2006/relationships" xmlns:p="http://schemas.openxmlformats.org/presentationml/2006/main">
+  <p:cSld>
+    <p:spTree>
+      <p:nvGrpSpPr>
+        <p:cNvPr id="1" name="">
+          <a:extLst>
+            <a:ext uri="{FF2B5EF4-FFF2-40B4-BE49-F238E27FC236}">
+              <a16:creationId xmlns:a16="http://schemas.microsoft.com/office/drawing/2014/main" id="{AB2313B0-4544-7C29-B530-A85FAA179746}"/>
+            </a:ext>
+          </a:extLst>
+        </p:cNvPr>
+        <p:cNvGrpSpPr/>
+        <p:nvPr/>
+      </p:nvGrpSpPr>
+      <p:grpSpPr>
+        <a:xfrm>
+          <a:off x="0" y="0"/>
+          <a:ext cx="0" cy="0"/>
+          <a:chOff x="0" y="0"/>
+          <a:chExt cx="0" cy="0"/>
+        </a:xfrm>
+      </p:grpSpPr>
+      <p:sp>
+        <p:nvSpPr>
+          <p:cNvPr id="2" name="Title 1">
+            <a:extLst>
+              <a:ext uri="{FF2B5EF4-FFF2-40B4-BE49-F238E27FC236}">
+                <a16:creationId xmlns:a16="http://schemas.microsoft.com/office/drawing/2014/main" id="{C26A6477-03BC-C17D-D432-509F4ED30274}"/>
+              </a:ext>
+            </a:extLst>
+          </p:cNvPr>
+          <p:cNvSpPr>
+            <a:spLocks noGrp="1"/>
+          </p:cNvSpPr>
+          <p:nvPr>
+            <p:ph type="title"/>
+          </p:nvPr>
+        </p:nvSpPr>
+        <p:spPr>
+          <a:xfrm>
+            <a:off x="0" y="355981"/>
+            <a:ext cx="12192000" cy="1325563"/>
+          </a:xfrm>
+        </p:spPr>
+        <p:txBody>
+          <a:bodyPr>
+            <a:normAutofit/>
+          </a:bodyPr>
+          <a:lstStyle/>
+          <a:p>
+            <a:pPr algn="ctr"/>
+            <a:r>
+              <a:rPr lang="en-US" sz="3600" b="1" dirty="0">
+                <a:solidFill>
+                  <a:schemeClr val="tx1">
+                    <a:lumMod val="50000"/>
+                    <a:lumOff val="50000"/>
+                  </a:schemeClr>
+                </a:solidFill>
+                <a:latin typeface="Bahnschrift" panose="020B0502040204020203" pitchFamily="34" charset="0"/>
+              </a:rPr>
+              <a:t>Does Bulb Actually Care About Sound?</a:t>
+            </a:r>
+          </a:p>
+        </p:txBody>
+      </p:sp>
+      <p:sp>
+        <p:nvSpPr>
+          <p:cNvPr id="3" name="Content Placeholder 2">
+            <a:extLst>
+              <a:ext uri="{FF2B5EF4-FFF2-40B4-BE49-F238E27FC236}">
+                <a16:creationId xmlns:a16="http://schemas.microsoft.com/office/drawing/2014/main" id="{8E84DF78-DC56-EC21-D608-3D23ADAD1818}"/>
+              </a:ext>
+            </a:extLst>
+          </p:cNvPr>
+          <p:cNvSpPr>
+            <a:spLocks noGrp="1"/>
+          </p:cNvSpPr>
+          <p:nvPr>
+            <p:ph idx="1"/>
+          </p:nvPr>
+        </p:nvSpPr>
+        <p:spPr>
+          <a:xfrm>
+            <a:off x="1549908" y="1843913"/>
+            <a:ext cx="9748012" cy="4351338"/>
+          </a:xfrm>
+        </p:spPr>
+        <p:txBody>
+          <a:bodyPr/>
+          <a:lstStyle/>
+          <a:p>
+            <a:r>
+              <a:rPr lang="en-US" dirty="0">
+                <a:latin typeface="Bahnschrift" panose="020B0502040204020203" pitchFamily="34" charset="0"/>
+              </a:rPr>
+              <a:t>In the multimodal task, we might infer that sound is useful to bulb because it provides information about odor.</a:t>
+            </a:r>
+          </a:p>
+          <a:p>
+            <a:r>
+              <a:rPr lang="en-US" dirty="0">
+                <a:latin typeface="Bahnschrift" panose="020B0502040204020203" pitchFamily="34" charset="0"/>
+              </a:rPr>
+              <a:t>Would an auditory-only task elicit cortico-bulbar responses? </a:t>
+            </a:r>
+          </a:p>
+          <a:p>
+            <a:endParaRPr lang="en-US" dirty="0">
+              <a:latin typeface="Bahnschrift" panose="020B0502040204020203" pitchFamily="34" charset="0"/>
+            </a:endParaRPr>
+          </a:p>
+        </p:txBody>
+      </p:sp>
+    </p:spTree>
+    <p:extLst>
+      <p:ext uri="{BB962C8B-B14F-4D97-AF65-F5344CB8AC3E}">
+        <p14:creationId xmlns:p14="http://schemas.microsoft.com/office/powerpoint/2010/main" val="3813214851"/>
+      </p:ext>
+    </p:extLst>
+  </p:cSld>
+  <p:clrMapOvr>
+    <a:masterClrMapping/>
+  </p:clrMapOvr>
+</p:sld>
+</file>
+
+<file path=ppt/slides/slide17.xml><?xml version="1.0" encoding="utf-8"?>
+<p:sld xmlns:a="http://schemas.openxmlformats.org/drawingml/2006/main" xmlns:r="http://schemas.openxmlformats.org/officeDocument/2006/relationships" xmlns:p="http://schemas.openxmlformats.org/presentationml/2006/main">
+  <p:cSld>
+    <p:spTree>
+      <p:nvGrpSpPr>
+        <p:cNvPr id="1" name="">
+          <a:extLst>
+            <a:ext uri="{FF2B5EF4-FFF2-40B4-BE49-F238E27FC236}">
+              <a16:creationId xmlns:a16="http://schemas.microsoft.com/office/drawing/2014/main" id="{F8D59AA1-04BB-671E-03E6-8C5E31613F87}"/>
+            </a:ext>
+          </a:extLst>
+        </p:cNvPr>
+        <p:cNvGrpSpPr/>
+        <p:nvPr/>
+      </p:nvGrpSpPr>
+      <p:grpSpPr>
+        <a:xfrm>
+          <a:off x="0" y="0"/>
+          <a:ext cx="0" cy="0"/>
+          <a:chOff x="0" y="0"/>
+          <a:chExt cx="0" cy="0"/>
+        </a:xfrm>
+      </p:grpSpPr>
+      <p:sp>
+        <p:nvSpPr>
+          <p:cNvPr id="2" name="Title 1">
+            <a:extLst>
+              <a:ext uri="{FF2B5EF4-FFF2-40B4-BE49-F238E27FC236}">
+                <a16:creationId xmlns:a16="http://schemas.microsoft.com/office/drawing/2014/main" id="{F27DB72B-6E4F-A972-C329-741A271BA138}"/>
+              </a:ext>
+            </a:extLst>
+          </p:cNvPr>
+          <p:cNvSpPr>
+            <a:spLocks noGrp="1"/>
+          </p:cNvSpPr>
+          <p:nvPr>
+            <p:ph type="title"/>
+          </p:nvPr>
+        </p:nvSpPr>
+        <p:spPr>
+          <a:xfrm>
+            <a:off x="0" y="355981"/>
+            <a:ext cx="12192000" cy="1325563"/>
+          </a:xfrm>
+        </p:spPr>
+        <p:txBody>
+          <a:bodyPr>
+            <a:normAutofit/>
+          </a:bodyPr>
+          <a:lstStyle/>
+          <a:p>
+            <a:pPr algn="ctr"/>
+            <a:r>
+              <a:rPr lang="en-US" sz="3600" b="1" dirty="0">
+                <a:solidFill>
+                  <a:schemeClr val="tx1">
+                    <a:lumMod val="50000"/>
+                    <a:lumOff val="50000"/>
+                  </a:schemeClr>
+                </a:solidFill>
+                <a:latin typeface="Bahnschrift" panose="020B0502040204020203" pitchFamily="34" charset="0"/>
+              </a:rPr>
+              <a:t>Auditory-Only Go/No-Go Task</a:t>
+            </a:r>
+          </a:p>
+        </p:txBody>
+      </p:sp>
+      <p:pic>
+        <p:nvPicPr>
+          <p:cNvPr id="7" name="Content Placeholder 6">
+            <a:extLst>
+              <a:ext uri="{FF2B5EF4-FFF2-40B4-BE49-F238E27FC236}">
+                <a16:creationId xmlns:a16="http://schemas.microsoft.com/office/drawing/2014/main" id="{8C337B6C-28D0-DF2A-5CFD-F4BC7A490304}"/>
+              </a:ext>
+            </a:extLst>
+          </p:cNvPr>
+          <p:cNvPicPr>
+            <a:picLocks/>
+          </p:cNvPicPr>
+          <p:nvPr/>
+        </p:nvPicPr>
+        <p:blipFill>
+          <a:blip r:embed="rId2">
+            <a:alphaModFix/>
+            <a:extLst>
+              <a:ext uri="{28A0092B-C50C-407E-A947-70E740481C1C}">
+                <a14:useLocalDpi xmlns:a14="http://schemas.microsoft.com/office/drawing/2010/main" val="0"/>
+              </a:ext>
+            </a:extLst>
+          </a:blip>
+          <a:srcRect/>
+          <a:stretch/>
+        </p:blipFill>
+        <p:spPr>
+          <a:xfrm>
+            <a:off x="1023223" y="2269508"/>
+            <a:ext cx="10145554" cy="2318983"/>
+          </a:xfrm>
+          <a:prstGeom prst="rect">
+            <a:avLst/>
+          </a:prstGeom>
+        </p:spPr>
+      </p:pic>
+    </p:spTree>
+    <p:extLst>
+      <p:ext uri="{BB962C8B-B14F-4D97-AF65-F5344CB8AC3E}">
+        <p14:creationId xmlns:p14="http://schemas.microsoft.com/office/powerpoint/2010/main" val="1437774319"/>
+      </p:ext>
+    </p:extLst>
+  </p:cSld>
+  <p:clrMapOvr>
+    <a:masterClrMapping/>
+  </p:clrMapOvr>
+</p:sld>
+</file>
+
+<file path=ppt/slides/slide18.xml><?xml version="1.0" encoding="utf-8"?>
+<p:sld xmlns:a="http://schemas.openxmlformats.org/drawingml/2006/main" xmlns:r="http://schemas.openxmlformats.org/officeDocument/2006/relationships" xmlns:p="http://schemas.openxmlformats.org/presentationml/2006/main">
+  <p:cSld>
+    <p:spTree>
+      <p:nvGrpSpPr>
+        <p:cNvPr id="1" name="">
+          <a:extLst>
+            <a:ext uri="{FF2B5EF4-FFF2-40B4-BE49-F238E27FC236}">
+              <a16:creationId xmlns:a16="http://schemas.microsoft.com/office/drawing/2014/main" id="{7C623385-7151-CBF9-E97F-5FD14C9AC431}"/>
+            </a:ext>
+          </a:extLst>
+        </p:cNvPr>
+        <p:cNvGrpSpPr/>
+        <p:nvPr/>
+      </p:nvGrpSpPr>
+      <p:grpSpPr>
+        <a:xfrm>
+          <a:off x="0" y="0"/>
+          <a:ext cx="0" cy="0"/>
+          <a:chOff x="0" y="0"/>
+          <a:chExt cx="0" cy="0"/>
+        </a:xfrm>
+      </p:grpSpPr>
+      <p:sp>
+        <p:nvSpPr>
+          <p:cNvPr id="2" name="Title 1">
+            <a:extLst>
+              <a:ext uri="{FF2B5EF4-FFF2-40B4-BE49-F238E27FC236}">
+                <a16:creationId xmlns:a16="http://schemas.microsoft.com/office/drawing/2014/main" id="{4AB2A053-ACE4-A067-72E0-A812C8DD2B22}"/>
+              </a:ext>
+            </a:extLst>
+          </p:cNvPr>
+          <p:cNvSpPr>
+            <a:spLocks noGrp="1"/>
+          </p:cNvSpPr>
+          <p:nvPr>
+            <p:ph type="title"/>
+          </p:nvPr>
+        </p:nvSpPr>
+        <p:spPr>
+          <a:xfrm>
+            <a:off x="0" y="355981"/>
+            <a:ext cx="12192000" cy="1325563"/>
+          </a:xfrm>
+        </p:spPr>
+        <p:txBody>
+          <a:bodyPr>
+            <a:normAutofit/>
+          </a:bodyPr>
+          <a:lstStyle/>
+          <a:p>
+            <a:pPr algn="ctr"/>
+            <a:r>
+              <a:rPr lang="en-US" sz="3600" b="1" dirty="0">
+                <a:solidFill>
+                  <a:schemeClr val="tx1">
+                    <a:lumMod val="50000"/>
+                    <a:lumOff val="50000"/>
+                  </a:schemeClr>
+                </a:solidFill>
+                <a:latin typeface="Bahnschrift" panose="020B0502040204020203" pitchFamily="34" charset="0"/>
+              </a:rPr>
+              <a:t>Auditory-Only Go/No-Go Task</a:t>
+            </a:r>
+          </a:p>
+        </p:txBody>
+      </p:sp>
+      <p:pic>
+        <p:nvPicPr>
+          <p:cNvPr id="4" name="Content Placeholder 6">
+            <a:extLst>
+              <a:ext uri="{FF2B5EF4-FFF2-40B4-BE49-F238E27FC236}">
+                <a16:creationId xmlns:a16="http://schemas.microsoft.com/office/drawing/2014/main" id="{3EEDE3FB-F617-385A-FBF2-A16FD8605173}"/>
+              </a:ext>
+            </a:extLst>
+          </p:cNvPr>
+          <p:cNvPicPr>
+            <a:picLocks/>
+          </p:cNvPicPr>
+          <p:nvPr/>
+        </p:nvPicPr>
+        <p:blipFill>
+          <a:blip r:embed="rId3">
+            <a:alphaModFix/>
+            <a:extLst>
+              <a:ext uri="{28A0092B-C50C-407E-A947-70E740481C1C}">
+                <a14:useLocalDpi xmlns:a14="http://schemas.microsoft.com/office/drawing/2010/main" val="0"/>
+              </a:ext>
+            </a:extLst>
+          </a:blip>
+          <a:srcRect/>
+          <a:stretch/>
+        </p:blipFill>
+        <p:spPr>
+          <a:xfrm>
+            <a:off x="1334095" y="1788468"/>
+            <a:ext cx="9523809" cy="3841163"/>
+          </a:xfrm>
+          <a:prstGeom prst="rect">
+            <a:avLst/>
+          </a:prstGeom>
+        </p:spPr>
+      </p:pic>
+    </p:spTree>
+    <p:extLst>
+      <p:ext uri="{BB962C8B-B14F-4D97-AF65-F5344CB8AC3E}">
+        <p14:creationId xmlns:p14="http://schemas.microsoft.com/office/powerpoint/2010/main" val="3530749371"/>
+      </p:ext>
+    </p:extLst>
+  </p:cSld>
+  <p:clrMapOvr>
+    <a:masterClrMapping/>
+  </p:clrMapOvr>
+</p:sld>
+</file>
+
+<file path=ppt/slides/slide19.xml><?xml version="1.0" encoding="utf-8"?>
+<p:sld xmlns:a="http://schemas.openxmlformats.org/drawingml/2006/main" xmlns:r="http://schemas.openxmlformats.org/officeDocument/2006/relationships" xmlns:p="http://schemas.openxmlformats.org/presentationml/2006/main">
+  <p:cSld>
+    <p:spTree>
+      <p:nvGrpSpPr>
+        <p:cNvPr id="1" name="">
+          <a:extLst>
+            <a:ext uri="{FF2B5EF4-FFF2-40B4-BE49-F238E27FC236}">
+              <a16:creationId xmlns:a16="http://schemas.microsoft.com/office/drawing/2014/main" id="{C8AB4764-B47D-7FBF-DD31-25433CA0CE26}"/>
+            </a:ext>
+          </a:extLst>
+        </p:cNvPr>
+        <p:cNvGrpSpPr/>
+        <p:nvPr/>
+      </p:nvGrpSpPr>
+      <p:grpSpPr>
+        <a:xfrm>
+          <a:off x="0" y="0"/>
+          <a:ext cx="0" cy="0"/>
+          <a:chOff x="0" y="0"/>
+          <a:chExt cx="0" cy="0"/>
+        </a:xfrm>
+      </p:grpSpPr>
+      <p:sp>
+        <p:nvSpPr>
+          <p:cNvPr id="2" name="Title 1">
+            <a:extLst>
+              <a:ext uri="{FF2B5EF4-FFF2-40B4-BE49-F238E27FC236}">
+                <a16:creationId xmlns:a16="http://schemas.microsoft.com/office/drawing/2014/main" id="{97D6F39A-B5E4-3F22-FFD1-DCF30FAE151C}"/>
+              </a:ext>
+            </a:extLst>
+          </p:cNvPr>
+          <p:cNvSpPr>
+            <a:spLocks noGrp="1"/>
+          </p:cNvSpPr>
+          <p:nvPr>
+            <p:ph type="title"/>
+          </p:nvPr>
+        </p:nvSpPr>
+        <p:spPr>
+          <a:xfrm>
+            <a:off x="0" y="2766218"/>
+            <a:ext cx="12192000" cy="1325563"/>
+          </a:xfrm>
+        </p:spPr>
+        <p:txBody>
+          <a:bodyPr>
+            <a:normAutofit/>
+          </a:bodyPr>
+          <a:lstStyle/>
+          <a:p>
+            <a:pPr algn="ctr"/>
+            <a:r>
+              <a:rPr lang="en-US" sz="5400" b="1" dirty="0">
+                <a:solidFill>
+                  <a:schemeClr val="tx1">
+                    <a:lumMod val="50000"/>
+                    <a:lumOff val="50000"/>
+                  </a:schemeClr>
+                </a:solidFill>
+                <a:latin typeface="Bahnschrift" panose="020B0502040204020203" pitchFamily="34" charset="0"/>
+              </a:rPr>
+              <a:t>Back To Multimodal Task</a:t>
+            </a:r>
+          </a:p>
+        </p:txBody>
+      </p:sp>
+    </p:spTree>
+    <p:extLst>
+      <p:ext uri="{BB962C8B-B14F-4D97-AF65-F5344CB8AC3E}">
+        <p14:creationId xmlns:p14="http://schemas.microsoft.com/office/powerpoint/2010/main" val="4255269339"/>
       </p:ext>
     </p:extLst>
   </p:cSld>
@@ -4206,7 +5921,619 @@
 </p:sld>
 </file>
 
+<file path=ppt/slides/slide20.xml><?xml version="1.0" encoding="utf-8"?>
+<p:sld xmlns:a="http://schemas.openxmlformats.org/drawingml/2006/main" xmlns:r="http://schemas.openxmlformats.org/officeDocument/2006/relationships" xmlns:p="http://schemas.openxmlformats.org/presentationml/2006/main">
+  <p:cSld>
+    <p:spTree>
+      <p:nvGrpSpPr>
+        <p:cNvPr id="1" name="">
+          <a:extLst>
+            <a:ext uri="{FF2B5EF4-FFF2-40B4-BE49-F238E27FC236}">
+              <a16:creationId xmlns:a16="http://schemas.microsoft.com/office/drawing/2014/main" id="{9E648A99-D2E4-664A-E408-24D4849A326D}"/>
+            </a:ext>
+          </a:extLst>
+        </p:cNvPr>
+        <p:cNvGrpSpPr/>
+        <p:nvPr/>
+      </p:nvGrpSpPr>
+      <p:grpSpPr>
+        <a:xfrm>
+          <a:off x="0" y="0"/>
+          <a:ext cx="0" cy="0"/>
+          <a:chOff x="0" y="0"/>
+          <a:chExt cx="0" cy="0"/>
+        </a:xfrm>
+      </p:grpSpPr>
+      <p:sp>
+        <p:nvSpPr>
+          <p:cNvPr id="2" name="Title 1">
+            <a:extLst>
+              <a:ext uri="{FF2B5EF4-FFF2-40B4-BE49-F238E27FC236}">
+                <a16:creationId xmlns:a16="http://schemas.microsoft.com/office/drawing/2014/main" id="{2ACDE719-1D0A-B845-F03D-95C9DA85F04D}"/>
+              </a:ext>
+            </a:extLst>
+          </p:cNvPr>
+          <p:cNvSpPr>
+            <a:spLocks noGrp="1"/>
+          </p:cNvSpPr>
+          <p:nvPr>
+            <p:ph type="title"/>
+          </p:nvPr>
+        </p:nvSpPr>
+        <p:spPr>
+          <a:xfrm>
+            <a:off x="0" y="355981"/>
+            <a:ext cx="12192000" cy="1325563"/>
+          </a:xfrm>
+        </p:spPr>
+        <p:txBody>
+          <a:bodyPr>
+            <a:normAutofit/>
+          </a:bodyPr>
+          <a:lstStyle/>
+          <a:p>
+            <a:pPr algn="ctr"/>
+            <a:r>
+              <a:rPr lang="en-US" sz="3600" b="1" dirty="0">
+                <a:solidFill>
+                  <a:schemeClr val="tx1">
+                    <a:lumMod val="50000"/>
+                    <a:lumOff val="50000"/>
+                  </a:schemeClr>
+                </a:solidFill>
+                <a:latin typeface="Bahnschrift" panose="020B0502040204020203" pitchFamily="34" charset="0"/>
+              </a:rPr>
+              <a:t>Fast Updating Feedback Activity</a:t>
+            </a:r>
+          </a:p>
+        </p:txBody>
+      </p:sp>
+      <p:pic>
+        <p:nvPicPr>
+          <p:cNvPr id="5" name="Content Placeholder 6">
+            <a:extLst>
+              <a:ext uri="{FF2B5EF4-FFF2-40B4-BE49-F238E27FC236}">
+                <a16:creationId xmlns:a16="http://schemas.microsoft.com/office/drawing/2014/main" id="{E62DCF70-4092-EF74-F748-C43106664910}"/>
+              </a:ext>
+            </a:extLst>
+          </p:cNvPr>
+          <p:cNvPicPr>
+            <a:picLocks/>
+          </p:cNvPicPr>
+          <p:nvPr/>
+        </p:nvPicPr>
+        <p:blipFill>
+          <a:blip r:embed="rId3">
+            <a:alphaModFix/>
+            <a:extLst>
+              <a:ext uri="{28A0092B-C50C-407E-A947-70E740481C1C}">
+                <a14:useLocalDpi xmlns:a14="http://schemas.microsoft.com/office/drawing/2010/main" val="0"/>
+              </a:ext>
+            </a:extLst>
+          </a:blip>
+          <a:srcRect/>
+          <a:stretch/>
+        </p:blipFill>
+        <p:spPr>
+          <a:xfrm>
+            <a:off x="1128425" y="1681544"/>
+            <a:ext cx="9935150" cy="3580480"/>
+          </a:xfrm>
+          <a:prstGeom prst="rect">
+            <a:avLst/>
+          </a:prstGeom>
+        </p:spPr>
+      </p:pic>
+    </p:spTree>
+    <p:extLst>
+      <p:ext uri="{BB962C8B-B14F-4D97-AF65-F5344CB8AC3E}">
+        <p14:creationId xmlns:p14="http://schemas.microsoft.com/office/powerpoint/2010/main" val="1957869853"/>
+      </p:ext>
+    </p:extLst>
+  </p:cSld>
+  <p:clrMapOvr>
+    <a:masterClrMapping/>
+  </p:clrMapOvr>
+</p:sld>
+</file>
+
+<file path=ppt/slides/slide21.xml><?xml version="1.0" encoding="utf-8"?>
+<p:sld xmlns:a="http://schemas.openxmlformats.org/drawingml/2006/main" xmlns:r="http://schemas.openxmlformats.org/officeDocument/2006/relationships" xmlns:p="http://schemas.openxmlformats.org/presentationml/2006/main">
+  <p:cSld>
+    <p:spTree>
+      <p:nvGrpSpPr>
+        <p:cNvPr id="1" name="">
+          <a:extLst>
+            <a:ext uri="{FF2B5EF4-FFF2-40B4-BE49-F238E27FC236}">
+              <a16:creationId xmlns:a16="http://schemas.microsoft.com/office/drawing/2014/main" id="{5F927260-64FF-4F28-1A6D-FF8C678742CF}"/>
+            </a:ext>
+          </a:extLst>
+        </p:cNvPr>
+        <p:cNvGrpSpPr/>
+        <p:nvPr/>
+      </p:nvGrpSpPr>
+      <p:grpSpPr>
+        <a:xfrm>
+          <a:off x="0" y="0"/>
+          <a:ext cx="0" cy="0"/>
+          <a:chOff x="0" y="0"/>
+          <a:chExt cx="0" cy="0"/>
+        </a:xfrm>
+      </p:grpSpPr>
+      <p:sp>
+        <p:nvSpPr>
+          <p:cNvPr id="2" name="Title 1">
+            <a:extLst>
+              <a:ext uri="{FF2B5EF4-FFF2-40B4-BE49-F238E27FC236}">
+                <a16:creationId xmlns:a16="http://schemas.microsoft.com/office/drawing/2014/main" id="{9B5A73A0-311A-56D6-7F2C-C8072B07347A}"/>
+              </a:ext>
+            </a:extLst>
+          </p:cNvPr>
+          <p:cNvSpPr>
+            <a:spLocks noGrp="1"/>
+          </p:cNvSpPr>
+          <p:nvPr>
+            <p:ph type="title"/>
+          </p:nvPr>
+        </p:nvSpPr>
+        <p:spPr>
+          <a:xfrm>
+            <a:off x="0" y="355981"/>
+            <a:ext cx="12192000" cy="1325563"/>
+          </a:xfrm>
+        </p:spPr>
+        <p:txBody>
+          <a:bodyPr>
+            <a:normAutofit/>
+          </a:bodyPr>
+          <a:lstStyle/>
+          <a:p>
+            <a:pPr algn="ctr"/>
+            <a:r>
+              <a:rPr lang="en-US" sz="3600" b="1" dirty="0">
+                <a:solidFill>
+                  <a:schemeClr val="tx1">
+                    <a:lumMod val="50000"/>
+                    <a:lumOff val="50000"/>
+                  </a:schemeClr>
+                </a:solidFill>
+                <a:latin typeface="Bahnschrift" panose="020B0502040204020203" pitchFamily="34" charset="0"/>
+              </a:rPr>
+              <a:t>Fast Updating Feedback Activity</a:t>
+            </a:r>
+          </a:p>
+        </p:txBody>
+      </p:sp>
+      <p:pic>
+        <p:nvPicPr>
+          <p:cNvPr id="5" name="Content Placeholder 6">
+            <a:extLst>
+              <a:ext uri="{FF2B5EF4-FFF2-40B4-BE49-F238E27FC236}">
+                <a16:creationId xmlns:a16="http://schemas.microsoft.com/office/drawing/2014/main" id="{F737F29C-DE52-0E9D-F9B5-3A9A69E6EB96}"/>
+              </a:ext>
+            </a:extLst>
+          </p:cNvPr>
+          <p:cNvPicPr>
+            <a:picLocks/>
+          </p:cNvPicPr>
+          <p:nvPr/>
+        </p:nvPicPr>
+        <p:blipFill>
+          <a:blip r:embed="rId3">
+            <a:alphaModFix/>
+            <a:extLst>
+              <a:ext uri="{28A0092B-C50C-407E-A947-70E740481C1C}">
+                <a14:useLocalDpi xmlns:a14="http://schemas.microsoft.com/office/drawing/2010/main" val="0"/>
+              </a:ext>
+            </a:extLst>
+          </a:blip>
+          <a:srcRect/>
+          <a:stretch/>
+        </p:blipFill>
+        <p:spPr>
+          <a:xfrm>
+            <a:off x="1128425" y="1681544"/>
+            <a:ext cx="9935149" cy="3580480"/>
+          </a:xfrm>
+          <a:prstGeom prst="rect">
+            <a:avLst/>
+          </a:prstGeom>
+        </p:spPr>
+      </p:pic>
+    </p:spTree>
+    <p:extLst>
+      <p:ext uri="{BB962C8B-B14F-4D97-AF65-F5344CB8AC3E}">
+        <p14:creationId xmlns:p14="http://schemas.microsoft.com/office/powerpoint/2010/main" val="4186172244"/>
+      </p:ext>
+    </p:extLst>
+  </p:cSld>
+  <p:clrMapOvr>
+    <a:masterClrMapping/>
+  </p:clrMapOvr>
+</p:sld>
+</file>
+
 <file path=ppt/slides/slide3.xml><?xml version="1.0" encoding="utf-8"?>
+<p:sld xmlns:a="http://schemas.openxmlformats.org/drawingml/2006/main" xmlns:r="http://schemas.openxmlformats.org/officeDocument/2006/relationships" xmlns:p="http://schemas.openxmlformats.org/presentationml/2006/main">
+  <p:cSld>
+    <p:spTree>
+      <p:nvGrpSpPr>
+        <p:cNvPr id="1" name="">
+          <a:extLst>
+            <a:ext uri="{FF2B5EF4-FFF2-40B4-BE49-F238E27FC236}">
+              <a16:creationId xmlns:a16="http://schemas.microsoft.com/office/drawing/2014/main" id="{9F89C12A-57C1-B0AA-37E0-70FC82D5E4C2}"/>
+            </a:ext>
+          </a:extLst>
+        </p:cNvPr>
+        <p:cNvGrpSpPr/>
+        <p:nvPr/>
+      </p:nvGrpSpPr>
+      <p:grpSpPr>
+        <a:xfrm>
+          <a:off x="0" y="0"/>
+          <a:ext cx="0" cy="0"/>
+          <a:chOff x="0" y="0"/>
+          <a:chExt cx="0" cy="0"/>
+        </a:xfrm>
+      </p:grpSpPr>
+      <p:sp>
+        <p:nvSpPr>
+          <p:cNvPr id="2" name="Title 1">
+            <a:extLst>
+              <a:ext uri="{FF2B5EF4-FFF2-40B4-BE49-F238E27FC236}">
+                <a16:creationId xmlns:a16="http://schemas.microsoft.com/office/drawing/2014/main" id="{B6F19FD6-2417-5DED-6211-122555B4AF8A}"/>
+              </a:ext>
+            </a:extLst>
+          </p:cNvPr>
+          <p:cNvSpPr>
+            <a:spLocks noGrp="1"/>
+          </p:cNvSpPr>
+          <p:nvPr>
+            <p:ph type="title"/>
+          </p:nvPr>
+        </p:nvSpPr>
+        <p:spPr>
+          <a:xfrm>
+            <a:off x="0" y="355981"/>
+            <a:ext cx="12192000" cy="1325563"/>
+          </a:xfrm>
+        </p:spPr>
+        <p:txBody>
+          <a:bodyPr>
+            <a:normAutofit/>
+          </a:bodyPr>
+          <a:lstStyle/>
+          <a:p>
+            <a:pPr algn="ctr"/>
+            <a:r>
+              <a:rPr lang="en-US" sz="3600" b="1" dirty="0">
+                <a:solidFill>
+                  <a:schemeClr val="tx1">
+                    <a:lumMod val="50000"/>
+                    <a:lumOff val="50000"/>
+                  </a:schemeClr>
+                </a:solidFill>
+                <a:latin typeface="Bahnschrift" panose="020B0502040204020203" pitchFamily="34" charset="0"/>
+              </a:rPr>
+              <a:t>Piriform Is Association Cortex</a:t>
+            </a:r>
+          </a:p>
+        </p:txBody>
+      </p:sp>
+      <p:sp>
+        <p:nvSpPr>
+          <p:cNvPr id="3" name="Content Placeholder 2">
+            <a:extLst>
+              <a:ext uri="{FF2B5EF4-FFF2-40B4-BE49-F238E27FC236}">
+                <a16:creationId xmlns:a16="http://schemas.microsoft.com/office/drawing/2014/main" id="{E7AE0437-1E4E-6A42-B679-01610CF5BAC9}"/>
+              </a:ext>
+            </a:extLst>
+          </p:cNvPr>
+          <p:cNvSpPr>
+            <a:spLocks noGrp="1"/>
+          </p:cNvSpPr>
+          <p:nvPr>
+            <p:ph idx="1"/>
+          </p:nvPr>
+        </p:nvSpPr>
+        <p:spPr>
+          <a:xfrm>
+            <a:off x="838200" y="1825625"/>
+            <a:ext cx="4058920" cy="4351338"/>
+          </a:xfrm>
+        </p:spPr>
+        <p:txBody>
+          <a:bodyPr/>
+          <a:lstStyle/>
+          <a:p>
+            <a:r>
+              <a:rPr lang="en-US" dirty="0">
+                <a:latin typeface="Bahnschrift" panose="020B0502040204020203" pitchFamily="34" charset="0"/>
+              </a:rPr>
+              <a:t>“Olfactory cortex”</a:t>
+            </a:r>
+          </a:p>
+          <a:p>
+            <a:r>
+              <a:rPr lang="en-US" dirty="0">
+                <a:latin typeface="Bahnschrift" panose="020B0502040204020203" pitchFamily="34" charset="0"/>
+              </a:rPr>
+              <a:t>In humans, </a:t>
+            </a:r>
+            <a:r>
+              <a:rPr lang="en-US" dirty="0" err="1">
+                <a:latin typeface="Bahnschrift" panose="020B0502040204020203" pitchFamily="34" charset="0"/>
+              </a:rPr>
+              <a:t>PCx</a:t>
+            </a:r>
+            <a:r>
+              <a:rPr lang="en-US" dirty="0">
+                <a:latin typeface="Bahnschrift" panose="020B0502040204020203" pitchFamily="34" charset="0"/>
+              </a:rPr>
+              <a:t> represents multimodal odor information.</a:t>
+            </a:r>
+          </a:p>
+        </p:txBody>
+      </p:sp>
+      <p:pic>
+        <p:nvPicPr>
+          <p:cNvPr id="6" name="Content Placeholder 4">
+            <a:extLst>
+              <a:ext uri="{FF2B5EF4-FFF2-40B4-BE49-F238E27FC236}">
+                <a16:creationId xmlns:a16="http://schemas.microsoft.com/office/drawing/2014/main" id="{DF5A9CF7-2F90-FA1D-B04A-A69B092C312E}"/>
+              </a:ext>
+            </a:extLst>
+          </p:cNvPr>
+          <p:cNvPicPr>
+            <a:picLocks noChangeAspect="1"/>
+          </p:cNvPicPr>
+          <p:nvPr/>
+        </p:nvPicPr>
+        <p:blipFill>
+          <a:blip r:embed="rId2">
+            <a:extLst>
+              <a:ext uri="{28A0092B-C50C-407E-A947-70E740481C1C}">
+                <a14:useLocalDpi xmlns:a14="http://schemas.microsoft.com/office/drawing/2010/main" val="0"/>
+              </a:ext>
+            </a:extLst>
+          </a:blip>
+          <a:srcRect/>
+          <a:stretch/>
+        </p:blipFill>
+        <p:spPr>
+          <a:xfrm>
+            <a:off x="4897120" y="1681544"/>
+            <a:ext cx="5669279" cy="5096625"/>
+          </a:xfrm>
+          <a:prstGeom prst="rect">
+            <a:avLst/>
+          </a:prstGeom>
+        </p:spPr>
+      </p:pic>
+      <p:sp>
+        <p:nvSpPr>
+          <p:cNvPr id="7" name="Subtitle 2">
+            <a:extLst>
+              <a:ext uri="{FF2B5EF4-FFF2-40B4-BE49-F238E27FC236}">
+                <a16:creationId xmlns:a16="http://schemas.microsoft.com/office/drawing/2014/main" id="{858C6BCB-F960-E259-E32B-00F722BACC65}"/>
+              </a:ext>
+            </a:extLst>
+          </p:cNvPr>
+          <p:cNvSpPr txBox="1">
+            <a:spLocks/>
+          </p:cNvSpPr>
+          <p:nvPr/>
+        </p:nvSpPr>
+        <p:spPr>
+          <a:xfrm>
+            <a:off x="10241280" y="6403150"/>
+            <a:ext cx="1950720" cy="454850"/>
+          </a:xfrm>
+          <a:prstGeom prst="rect">
+            <a:avLst/>
+          </a:prstGeom>
+        </p:spPr>
+        <p:txBody>
+          <a:bodyPr vert="horz" lIns="91440" tIns="45720" rIns="91440" bIns="45720" rtlCol="0">
+            <a:normAutofit/>
+          </a:bodyPr>
+          <a:lstStyle>
+            <a:lvl1pPr marL="228600" indent="-228600" algn="l" defTabSz="914400" rtl="0" eaLnBrk="1" latinLnBrk="0" hangingPunct="1">
+              <a:lnSpc>
+                <a:spcPct val="90000"/>
+              </a:lnSpc>
+              <a:spcBef>
+                <a:spcPts val="1000"/>
+              </a:spcBef>
+              <a:buFont typeface="Arial" panose="020B0604020202020204" pitchFamily="34" charset="0"/>
+              <a:buChar char="•"/>
+              <a:defRPr sz="2800" kern="1200">
+                <a:solidFill>
+                  <a:schemeClr val="tx1"/>
+                </a:solidFill>
+                <a:latin typeface="+mn-lt"/>
+                <a:ea typeface="+mn-ea"/>
+                <a:cs typeface="+mn-cs"/>
+              </a:defRPr>
+            </a:lvl1pPr>
+            <a:lvl2pPr marL="685800" indent="-228600" algn="l" defTabSz="914400" rtl="0" eaLnBrk="1" latinLnBrk="0" hangingPunct="1">
+              <a:lnSpc>
+                <a:spcPct val="90000"/>
+              </a:lnSpc>
+              <a:spcBef>
+                <a:spcPts val="500"/>
+              </a:spcBef>
+              <a:buFont typeface="Arial" panose="020B0604020202020204" pitchFamily="34" charset="0"/>
+              <a:buChar char="•"/>
+              <a:defRPr sz="2400" kern="1200">
+                <a:solidFill>
+                  <a:schemeClr val="tx1"/>
+                </a:solidFill>
+                <a:latin typeface="+mn-lt"/>
+                <a:ea typeface="+mn-ea"/>
+                <a:cs typeface="+mn-cs"/>
+              </a:defRPr>
+            </a:lvl2pPr>
+            <a:lvl3pPr marL="1143000" indent="-228600" algn="l" defTabSz="914400" rtl="0" eaLnBrk="1" latinLnBrk="0" hangingPunct="1">
+              <a:lnSpc>
+                <a:spcPct val="90000"/>
+              </a:lnSpc>
+              <a:spcBef>
+                <a:spcPts val="500"/>
+              </a:spcBef>
+              <a:buFont typeface="Arial" panose="020B0604020202020204" pitchFamily="34" charset="0"/>
+              <a:buChar char="•"/>
+              <a:defRPr sz="2000" kern="1200">
+                <a:solidFill>
+                  <a:schemeClr val="tx1"/>
+                </a:solidFill>
+                <a:latin typeface="+mn-lt"/>
+                <a:ea typeface="+mn-ea"/>
+                <a:cs typeface="+mn-cs"/>
+              </a:defRPr>
+            </a:lvl3pPr>
+            <a:lvl4pPr marL="1600200" indent="-228600" algn="l" defTabSz="914400" rtl="0" eaLnBrk="1" latinLnBrk="0" hangingPunct="1">
+              <a:lnSpc>
+                <a:spcPct val="90000"/>
+              </a:lnSpc>
+              <a:spcBef>
+                <a:spcPts val="500"/>
+              </a:spcBef>
+              <a:buFont typeface="Arial" panose="020B0604020202020204" pitchFamily="34" charset="0"/>
+              <a:buChar char="•"/>
+              <a:defRPr sz="1800" kern="1200">
+                <a:solidFill>
+                  <a:schemeClr val="tx1"/>
+                </a:solidFill>
+                <a:latin typeface="+mn-lt"/>
+                <a:ea typeface="+mn-ea"/>
+                <a:cs typeface="+mn-cs"/>
+              </a:defRPr>
+            </a:lvl4pPr>
+            <a:lvl5pPr marL="2057400" indent="-228600" algn="l" defTabSz="914400" rtl="0" eaLnBrk="1" latinLnBrk="0" hangingPunct="1">
+              <a:lnSpc>
+                <a:spcPct val="90000"/>
+              </a:lnSpc>
+              <a:spcBef>
+                <a:spcPts val="500"/>
+              </a:spcBef>
+              <a:buFont typeface="Arial" panose="020B0604020202020204" pitchFamily="34" charset="0"/>
+              <a:buChar char="•"/>
+              <a:defRPr sz="1800" kern="1200">
+                <a:solidFill>
+                  <a:schemeClr val="tx1"/>
+                </a:solidFill>
+                <a:latin typeface="+mn-lt"/>
+                <a:ea typeface="+mn-ea"/>
+                <a:cs typeface="+mn-cs"/>
+              </a:defRPr>
+            </a:lvl5pPr>
+            <a:lvl6pPr marL="2514600" indent="-228600" algn="l" defTabSz="914400" rtl="0" eaLnBrk="1" latinLnBrk="0" hangingPunct="1">
+              <a:lnSpc>
+                <a:spcPct val="90000"/>
+              </a:lnSpc>
+              <a:spcBef>
+                <a:spcPts val="500"/>
+              </a:spcBef>
+              <a:buFont typeface="Arial" panose="020B0604020202020204" pitchFamily="34" charset="0"/>
+              <a:buChar char="•"/>
+              <a:defRPr sz="1800" kern="1200">
+                <a:solidFill>
+                  <a:schemeClr val="tx1"/>
+                </a:solidFill>
+                <a:latin typeface="+mn-lt"/>
+                <a:ea typeface="+mn-ea"/>
+                <a:cs typeface="+mn-cs"/>
+              </a:defRPr>
+            </a:lvl6pPr>
+            <a:lvl7pPr marL="2971800" indent="-228600" algn="l" defTabSz="914400" rtl="0" eaLnBrk="1" latinLnBrk="0" hangingPunct="1">
+              <a:lnSpc>
+                <a:spcPct val="90000"/>
+              </a:lnSpc>
+              <a:spcBef>
+                <a:spcPts val="500"/>
+              </a:spcBef>
+              <a:buFont typeface="Arial" panose="020B0604020202020204" pitchFamily="34" charset="0"/>
+              <a:buChar char="•"/>
+              <a:defRPr sz="1800" kern="1200">
+                <a:solidFill>
+                  <a:schemeClr val="tx1"/>
+                </a:solidFill>
+                <a:latin typeface="+mn-lt"/>
+                <a:ea typeface="+mn-ea"/>
+                <a:cs typeface="+mn-cs"/>
+              </a:defRPr>
+            </a:lvl7pPr>
+            <a:lvl8pPr marL="3429000" indent="-228600" algn="l" defTabSz="914400" rtl="0" eaLnBrk="1" latinLnBrk="0" hangingPunct="1">
+              <a:lnSpc>
+                <a:spcPct val="90000"/>
+              </a:lnSpc>
+              <a:spcBef>
+                <a:spcPts val="500"/>
+              </a:spcBef>
+              <a:buFont typeface="Arial" panose="020B0604020202020204" pitchFamily="34" charset="0"/>
+              <a:buChar char="•"/>
+              <a:defRPr sz="1800" kern="1200">
+                <a:solidFill>
+                  <a:schemeClr val="tx1"/>
+                </a:solidFill>
+                <a:latin typeface="+mn-lt"/>
+                <a:ea typeface="+mn-ea"/>
+                <a:cs typeface="+mn-cs"/>
+              </a:defRPr>
+            </a:lvl8pPr>
+            <a:lvl9pPr marL="3886200" indent="-228600" algn="l" defTabSz="914400" rtl="0" eaLnBrk="1" latinLnBrk="0" hangingPunct="1">
+              <a:lnSpc>
+                <a:spcPct val="90000"/>
+              </a:lnSpc>
+              <a:spcBef>
+                <a:spcPts val="500"/>
+              </a:spcBef>
+              <a:buFont typeface="Arial" panose="020B0604020202020204" pitchFamily="34" charset="0"/>
+              <a:buChar char="•"/>
+              <a:defRPr sz="1800" kern="1200">
+                <a:solidFill>
+                  <a:schemeClr val="tx1"/>
+                </a:solidFill>
+                <a:latin typeface="+mn-lt"/>
+                <a:ea typeface="+mn-ea"/>
+                <a:cs typeface="+mn-cs"/>
+              </a:defRPr>
+            </a:lvl9pPr>
+          </a:lstStyle>
+          <a:p>
+            <a:pPr marL="0" indent="0">
+              <a:buNone/>
+            </a:pPr>
+            <a:r>
+              <a:rPr lang="en-US" sz="1800" dirty="0">
+                <a:solidFill>
+                  <a:schemeClr val="tx1">
+                    <a:lumMod val="50000"/>
+                    <a:lumOff val="50000"/>
+                  </a:schemeClr>
+                </a:solidFill>
+                <a:latin typeface="Bahnschrift" panose="020B0502040204020203" pitchFamily="34" charset="0"/>
+              </a:rPr>
+              <a:t>Kehl et al., 2024</a:t>
+            </a:r>
+          </a:p>
+        </p:txBody>
+      </p:sp>
+    </p:spTree>
+    <p:extLst>
+      <p:ext uri="{BB962C8B-B14F-4D97-AF65-F5344CB8AC3E}">
+        <p14:creationId xmlns:p14="http://schemas.microsoft.com/office/powerpoint/2010/main" val="4036015502"/>
+      </p:ext>
+    </p:extLst>
+  </p:cSld>
+  <p:clrMapOvr>
+    <a:masterClrMapping/>
+  </p:clrMapOvr>
+</p:sld>
+</file>
+
+<file path=ppt/slides/slide4.xml><?xml version="1.0" encoding="utf-8"?>
 <p:sld xmlns:a="http://schemas.openxmlformats.org/drawingml/2006/main" xmlns:r="http://schemas.openxmlformats.org/officeDocument/2006/relationships" xmlns:p="http://schemas.openxmlformats.org/presentationml/2006/main">
   <p:cSld>
     <p:spTree>
@@ -4223,34 +6550,6 @@
           <a:chExt cx="0" cy="0"/>
         </a:xfrm>
       </p:grpSpPr>
-      <p:sp>
-        <p:nvSpPr>
-          <p:cNvPr id="3" name="Content Placeholder 2">
-            <a:extLst>
-              <a:ext uri="{FF2B5EF4-FFF2-40B4-BE49-F238E27FC236}">
-                <a16:creationId xmlns:a16="http://schemas.microsoft.com/office/drawing/2014/main" id="{DE4B28B7-F1DA-72F0-42B5-5889E3AD7ED0}"/>
-              </a:ext>
-            </a:extLst>
-          </p:cNvPr>
-          <p:cNvSpPr>
-            <a:spLocks noGrp="1"/>
-          </p:cNvSpPr>
-          <p:nvPr>
-            <p:ph idx="1"/>
-          </p:nvPr>
-        </p:nvSpPr>
-        <p:spPr/>
-        <p:txBody>
-          <a:bodyPr/>
-          <a:lstStyle/>
-          <a:p>
-            <a:r>
-              <a:rPr lang="en-US" dirty="0"/>
-              <a:t>Diagram bulb and piriform here</a:t>
-            </a:r>
-          </a:p>
-        </p:txBody>
-      </p:sp>
       <p:sp>
         <p:nvSpPr>
           <p:cNvPr id="6" name="Title 1">
@@ -4309,11 +6608,48 @@
                 </a:solidFill>
                 <a:latin typeface="Bahnschrift" panose="020B0502040204020203" pitchFamily="34" charset="0"/>
               </a:rPr>
-              <a:t>Early Olfactory Circuit</a:t>
-            </a:r>
-          </a:p>
-        </p:txBody>
-      </p:sp>
+              <a:t>Cortico-Bulbar Feedback</a:t>
+            </a:r>
+          </a:p>
+        </p:txBody>
+      </p:sp>
+      <p:pic>
+        <p:nvPicPr>
+          <p:cNvPr id="5" name="Content Placeholder 6">
+            <a:extLst>
+              <a:ext uri="{FF2B5EF4-FFF2-40B4-BE49-F238E27FC236}">
+                <a16:creationId xmlns:a16="http://schemas.microsoft.com/office/drawing/2014/main" id="{2EAA9FC2-2B26-9751-250F-5E347B854332}"/>
+              </a:ext>
+            </a:extLst>
+          </p:cNvPr>
+          <p:cNvPicPr>
+            <a:picLocks noGrp="1" noChangeAspect="1"/>
+          </p:cNvPicPr>
+          <p:nvPr>
+            <p:ph idx="1"/>
+          </p:nvPr>
+        </p:nvPicPr>
+        <p:blipFill>
+          <a:blip r:embed="rId2">
+            <a:extLst>
+              <a:ext uri="{28A0092B-C50C-407E-A947-70E740481C1C}">
+                <a14:useLocalDpi xmlns:a14="http://schemas.microsoft.com/office/drawing/2010/main" val="0"/>
+              </a:ext>
+            </a:extLst>
+          </a:blip>
+          <a:srcRect/>
+          <a:stretch/>
+        </p:blipFill>
+        <p:spPr>
+          <a:xfrm>
+            <a:off x="1453143" y="1844104"/>
+            <a:ext cx="9285714" cy="3590476"/>
+          </a:xfrm>
+          <a:prstGeom prst="rect">
+            <a:avLst/>
+          </a:prstGeom>
+        </p:spPr>
+      </p:pic>
     </p:spTree>
     <p:extLst>
       <p:ext uri="{BB962C8B-B14F-4D97-AF65-F5344CB8AC3E}">
@@ -4327,7 +6663,7 @@
 </p:sld>
 </file>
 
-<file path=ppt/slides/slide4.xml><?xml version="1.0" encoding="utf-8"?>
+<file path=ppt/slides/slide5.xml><?xml version="1.0" encoding="utf-8"?>
 <p:sld xmlns:a="http://schemas.openxmlformats.org/drawingml/2006/main" xmlns:r="http://schemas.openxmlformats.org/officeDocument/2006/relationships" xmlns:p="http://schemas.openxmlformats.org/presentationml/2006/main">
   <p:cSld>
     <p:spTree>
@@ -4389,7 +6725,7 @@
                 </a:solidFill>
                 <a:latin typeface="Bahnschrift" panose="020B0502040204020203" pitchFamily="34" charset="0"/>
               </a:rPr>
-              <a:t>Experiment</a:t>
+              <a:t>Experiment 1</a:t>
             </a:r>
           </a:p>
         </p:txBody>
@@ -4421,24 +6757,32 @@
           <a:lstStyle/>
           <a:p>
             <a:r>
-              <a:rPr lang="en-US" dirty="0"/>
-              <a:t>Go no-go task</a:t>
-            </a:r>
-          </a:p>
-          <a:p>
-            <a:r>
-              <a:rPr lang="en-US" dirty="0"/>
+              <a:rPr lang="en-US" dirty="0">
+                <a:latin typeface="Bahnschrift" panose="020B0502040204020203" pitchFamily="34" charset="0"/>
+              </a:rPr>
+              <a:t>Go/no-go task</a:t>
+            </a:r>
+          </a:p>
+          <a:p>
+            <a:r>
+              <a:rPr lang="en-US" dirty="0">
+                <a:latin typeface="Bahnschrift" panose="020B0502040204020203" pitchFamily="34" charset="0"/>
+              </a:rPr>
               <a:t>Odorant and audio stimuli</a:t>
             </a:r>
           </a:p>
           <a:p>
             <a:r>
-              <a:rPr lang="en-US" dirty="0"/>
-              <a:t>Cue-reversal every n blocks</a:t>
-            </a:r>
-          </a:p>
-          <a:p>
-            <a:endParaRPr lang="en-US" dirty="0"/>
+              <a:rPr lang="en-US" dirty="0">
+                <a:latin typeface="Bahnschrift" panose="020B0502040204020203" pitchFamily="34" charset="0"/>
+              </a:rPr>
+              <a:t>Rule-reversals in block design</a:t>
+            </a:r>
+          </a:p>
+          <a:p>
+            <a:endParaRPr lang="en-US" dirty="0">
+              <a:latin typeface="Bahnschrift" panose="020B0502040204020203" pitchFamily="34" charset="0"/>
+            </a:endParaRPr>
           </a:p>
         </p:txBody>
       </p:sp>
@@ -4446,136 +6790,6 @@
     <p:extLst>
       <p:ext uri="{BB962C8B-B14F-4D97-AF65-F5344CB8AC3E}">
         <p14:creationId xmlns:p14="http://schemas.microsoft.com/office/powerpoint/2010/main" val="2195624981"/>
-      </p:ext>
-    </p:extLst>
-  </p:cSld>
-  <p:clrMapOvr>
-    <a:masterClrMapping/>
-  </p:clrMapOvr>
-</p:sld>
-</file>
-
-<file path=ppt/slides/slide5.xml><?xml version="1.0" encoding="utf-8"?>
-<p:sld xmlns:a="http://schemas.openxmlformats.org/drawingml/2006/main" xmlns:r="http://schemas.openxmlformats.org/officeDocument/2006/relationships" xmlns:p="http://schemas.openxmlformats.org/presentationml/2006/main">
-  <p:cSld>
-    <p:spTree>
-      <p:nvGrpSpPr>
-        <p:cNvPr id="1" name="">
-          <a:extLst>
-            <a:ext uri="{FF2B5EF4-FFF2-40B4-BE49-F238E27FC236}">
-              <a16:creationId xmlns:a16="http://schemas.microsoft.com/office/drawing/2014/main" id="{04B0537A-5ED9-A48A-1E2B-95D85A4565C4}"/>
-            </a:ext>
-          </a:extLst>
-        </p:cNvPr>
-        <p:cNvGrpSpPr/>
-        <p:nvPr/>
-      </p:nvGrpSpPr>
-      <p:grpSpPr>
-        <a:xfrm>
-          <a:off x="0" y="0"/>
-          <a:ext cx="0" cy="0"/>
-          <a:chOff x="0" y="0"/>
-          <a:chExt cx="0" cy="0"/>
-        </a:xfrm>
-      </p:grpSpPr>
-      <p:sp>
-        <p:nvSpPr>
-          <p:cNvPr id="2" name="Title 1">
-            <a:extLst>
-              <a:ext uri="{FF2B5EF4-FFF2-40B4-BE49-F238E27FC236}">
-                <a16:creationId xmlns:a16="http://schemas.microsoft.com/office/drawing/2014/main" id="{A3FC28F2-302A-40F3-9F9F-78C621430368}"/>
-              </a:ext>
-            </a:extLst>
-          </p:cNvPr>
-          <p:cNvSpPr>
-            <a:spLocks noGrp="1"/>
-          </p:cNvSpPr>
-          <p:nvPr>
-            <p:ph type="title"/>
-          </p:nvPr>
-        </p:nvSpPr>
-        <p:spPr>
-          <a:xfrm>
-            <a:off x="0" y="355981"/>
-            <a:ext cx="12192000" cy="1325563"/>
-          </a:xfrm>
-        </p:spPr>
-        <p:txBody>
-          <a:bodyPr>
-            <a:normAutofit/>
-          </a:bodyPr>
-          <a:lstStyle/>
-          <a:p>
-            <a:pPr algn="ctr"/>
-            <a:r>
-              <a:rPr lang="en-US" sz="3600" b="1" dirty="0">
-                <a:solidFill>
-                  <a:schemeClr val="tx1">
-                    <a:lumMod val="50000"/>
-                    <a:lumOff val="50000"/>
-                  </a:schemeClr>
-                </a:solidFill>
-                <a:latin typeface="Bahnschrift" panose="020B0502040204020203" pitchFamily="34" charset="0"/>
-              </a:rPr>
-              <a:t>Experiment</a:t>
-            </a:r>
-          </a:p>
-        </p:txBody>
-      </p:sp>
-      <p:sp>
-        <p:nvSpPr>
-          <p:cNvPr id="3" name="Content Placeholder 2">
-            <a:extLst>
-              <a:ext uri="{FF2B5EF4-FFF2-40B4-BE49-F238E27FC236}">
-                <a16:creationId xmlns:a16="http://schemas.microsoft.com/office/drawing/2014/main" id="{31D75C93-B0AC-7480-22E5-446F1C78F375}"/>
-              </a:ext>
-            </a:extLst>
-          </p:cNvPr>
-          <p:cNvSpPr>
-            <a:spLocks noGrp="1"/>
-          </p:cNvSpPr>
-          <p:nvPr>
-            <p:ph idx="1"/>
-          </p:nvPr>
-        </p:nvSpPr>
-        <p:spPr>
-          <a:xfrm>
-            <a:off x="1549908" y="1843913"/>
-            <a:ext cx="8086344" cy="4351338"/>
-          </a:xfrm>
-        </p:spPr>
-        <p:txBody>
-          <a:bodyPr/>
-          <a:lstStyle/>
-          <a:p>
-            <a:r>
-              <a:rPr lang="en-US" dirty="0"/>
-              <a:t>Piriform </a:t>
-            </a:r>
-            <a:r>
-              <a:rPr lang="en-US" dirty="0" err="1"/>
-              <a:t>efferents</a:t>
-            </a:r>
-            <a:r>
-              <a:rPr lang="en-US" dirty="0"/>
-              <a:t> labelled</a:t>
-            </a:r>
-          </a:p>
-          <a:p>
-            <a:r>
-              <a:rPr lang="en-US" dirty="0"/>
-              <a:t>Do axonal boutons in OB encode cue reversal?</a:t>
-            </a:r>
-          </a:p>
-          <a:p>
-            <a:endParaRPr lang="en-US" dirty="0"/>
-          </a:p>
-        </p:txBody>
-      </p:sp>
-    </p:spTree>
-    <p:extLst>
-      <p:ext uri="{BB962C8B-B14F-4D97-AF65-F5344CB8AC3E}">
-        <p14:creationId xmlns:p14="http://schemas.microsoft.com/office/powerpoint/2010/main" val="3704102812"/>
       </p:ext>
     </p:extLst>
   </p:cSld>
@@ -4647,7 +6861,7 @@
                 </a:solidFill>
                 <a:latin typeface="Bahnschrift" panose="020B0502040204020203" pitchFamily="34" charset="0"/>
               </a:rPr>
-              <a:t>Experiment</a:t>
+              <a:t>Task Design</a:t>
             </a:r>
           </a:p>
         </p:txBody>
@@ -4669,21 +6883,22 @@
           </p:nvPr>
         </p:nvPicPr>
         <p:blipFill>
-          <a:blip r:embed="rId2">
+          <a:blip r:embed="rId3">
             <a:extLst>
               <a:ext uri="{28A0092B-C50C-407E-A947-70E740481C1C}">
                 <a14:useLocalDpi xmlns:a14="http://schemas.microsoft.com/office/drawing/2010/main" val="0"/>
               </a:ext>
             </a:extLst>
           </a:blip>
+          <a:srcRect l="3212" r="26557"/>
           <a:stretch>
             <a:fillRect/>
           </a:stretch>
         </p:blipFill>
         <p:spPr>
           <a:xfrm>
-            <a:off x="902852" y="1813434"/>
-            <a:ext cx="10515600" cy="3507519"/>
+            <a:off x="1548053" y="1681544"/>
+            <a:ext cx="9095894" cy="4320000"/>
           </a:xfrm>
           <a:prstGeom prst="rect">
             <a:avLst/>
@@ -4711,6 +6926,125 @@
         <p:cNvPr id="1" name="">
           <a:extLst>
             <a:ext uri="{FF2B5EF4-FFF2-40B4-BE49-F238E27FC236}">
+              <a16:creationId xmlns:a16="http://schemas.microsoft.com/office/drawing/2014/main" id="{3AFABFE4-5379-C41F-D06D-E9C59566172A}"/>
+            </a:ext>
+          </a:extLst>
+        </p:cNvPr>
+        <p:cNvGrpSpPr/>
+        <p:nvPr/>
+      </p:nvGrpSpPr>
+      <p:grpSpPr>
+        <a:xfrm>
+          <a:off x="0" y="0"/>
+          <a:ext cx="0" cy="0"/>
+          <a:chOff x="0" y="0"/>
+          <a:chExt cx="0" cy="0"/>
+        </a:xfrm>
+      </p:grpSpPr>
+      <p:sp>
+        <p:nvSpPr>
+          <p:cNvPr id="2" name="Title 1">
+            <a:extLst>
+              <a:ext uri="{FF2B5EF4-FFF2-40B4-BE49-F238E27FC236}">
+                <a16:creationId xmlns:a16="http://schemas.microsoft.com/office/drawing/2014/main" id="{93F01746-9C16-01FE-87C4-61A555A524B7}"/>
+              </a:ext>
+            </a:extLst>
+          </p:cNvPr>
+          <p:cNvSpPr>
+            <a:spLocks noGrp="1"/>
+          </p:cNvSpPr>
+          <p:nvPr>
+            <p:ph type="title"/>
+          </p:nvPr>
+        </p:nvSpPr>
+        <p:spPr>
+          <a:xfrm>
+            <a:off x="0" y="355981"/>
+            <a:ext cx="12192000" cy="1325563"/>
+          </a:xfrm>
+        </p:spPr>
+        <p:txBody>
+          <a:bodyPr>
+            <a:normAutofit/>
+          </a:bodyPr>
+          <a:lstStyle/>
+          <a:p>
+            <a:pPr algn="ctr"/>
+            <a:r>
+              <a:rPr lang="en-US" sz="3600" b="1" dirty="0">
+                <a:solidFill>
+                  <a:schemeClr val="tx1">
+                    <a:lumMod val="50000"/>
+                    <a:lumOff val="50000"/>
+                  </a:schemeClr>
+                </a:solidFill>
+                <a:latin typeface="Bahnschrift" panose="020B0502040204020203" pitchFamily="34" charset="0"/>
+              </a:rPr>
+              <a:t>Task Design</a:t>
+            </a:r>
+          </a:p>
+        </p:txBody>
+      </p:sp>
+      <p:pic>
+        <p:nvPicPr>
+          <p:cNvPr id="7" name="Content Placeholder 6">
+            <a:extLst>
+              <a:ext uri="{FF2B5EF4-FFF2-40B4-BE49-F238E27FC236}">
+                <a16:creationId xmlns:a16="http://schemas.microsoft.com/office/drawing/2014/main" id="{B147C689-4720-3EB7-D075-8F580566623C}"/>
+              </a:ext>
+            </a:extLst>
+          </p:cNvPr>
+          <p:cNvPicPr>
+            <a:picLocks noGrp="1" noChangeAspect="1"/>
+          </p:cNvPicPr>
+          <p:nvPr>
+            <p:ph idx="1"/>
+          </p:nvPr>
+        </p:nvPicPr>
+        <p:blipFill>
+          <a:blip r:embed="rId3">
+            <a:extLst>
+              <a:ext uri="{28A0092B-C50C-407E-A947-70E740481C1C}">
+                <a14:useLocalDpi xmlns:a14="http://schemas.microsoft.com/office/drawing/2010/main" val="0"/>
+              </a:ext>
+            </a:extLst>
+          </a:blip>
+          <a:srcRect l="73508" t="8046"/>
+          <a:stretch>
+            <a:fillRect/>
+          </a:stretch>
+        </p:blipFill>
+        <p:spPr>
+          <a:xfrm>
+            <a:off x="4342213" y="1681544"/>
+            <a:ext cx="3812374" cy="4413753"/>
+          </a:xfrm>
+          <a:prstGeom prst="rect">
+            <a:avLst/>
+          </a:prstGeom>
+        </p:spPr>
+      </p:pic>
+    </p:spTree>
+    <p:extLst>
+      <p:ext uri="{BB962C8B-B14F-4D97-AF65-F5344CB8AC3E}">
+        <p14:creationId xmlns:p14="http://schemas.microsoft.com/office/powerpoint/2010/main" val="1962735765"/>
+      </p:ext>
+    </p:extLst>
+  </p:cSld>
+  <p:clrMapOvr>
+    <a:masterClrMapping/>
+  </p:clrMapOvr>
+</p:sld>
+</file>
+
+<file path=ppt/slides/slide8.xml><?xml version="1.0" encoding="utf-8"?>
+<p:sld xmlns:a="http://schemas.openxmlformats.org/drawingml/2006/main" xmlns:r="http://schemas.openxmlformats.org/officeDocument/2006/relationships" xmlns:p="http://schemas.openxmlformats.org/presentationml/2006/main">
+  <p:cSld>
+    <p:spTree>
+      <p:nvGrpSpPr>
+        <p:cNvPr id="1" name="">
+          <a:extLst>
+            <a:ext uri="{FF2B5EF4-FFF2-40B4-BE49-F238E27FC236}">
               <a16:creationId xmlns:a16="http://schemas.microsoft.com/office/drawing/2014/main" id="{DC3834E9-5D97-9589-1575-9E28FF0CDFD6}"/>
             </a:ext>
           </a:extLst>
@@ -4798,8 +7132,8 @@
         </p:blipFill>
         <p:spPr>
           <a:xfrm>
-            <a:off x="902852" y="1519552"/>
-            <a:ext cx="10515600" cy="4769333"/>
+            <a:off x="1217813" y="1499232"/>
+            <a:ext cx="10073333" cy="4573333"/>
           </a:xfrm>
           <a:prstGeom prst="rect">
             <a:avLst/>
@@ -4819,7 +7153,7 @@
 </p:sld>
 </file>
 
-<file path=ppt/slides/slide8.xml><?xml version="1.0" encoding="utf-8"?>
+<file path=ppt/slides/slide9.xml><?xml version="1.0" encoding="utf-8"?>
 <p:sld xmlns:a="http://schemas.openxmlformats.org/drawingml/2006/main" xmlns:r="http://schemas.openxmlformats.org/officeDocument/2006/relationships" xmlns:p="http://schemas.openxmlformats.org/presentationml/2006/main">
   <p:cSld>
     <p:spTree>
@@ -4842,50 +7176,6 @@
           <a:chExt cx="0" cy="0"/>
         </a:xfrm>
       </p:grpSpPr>
-      <p:sp>
-        <p:nvSpPr>
-          <p:cNvPr id="2" name="Title 1">
-            <a:extLst>
-              <a:ext uri="{FF2B5EF4-FFF2-40B4-BE49-F238E27FC236}">
-                <a16:creationId xmlns:a16="http://schemas.microsoft.com/office/drawing/2014/main" id="{92794F52-A0E4-8789-CFFA-103157F46B2D}"/>
-              </a:ext>
-            </a:extLst>
-          </p:cNvPr>
-          <p:cNvSpPr>
-            <a:spLocks noGrp="1"/>
-          </p:cNvSpPr>
-          <p:nvPr>
-            <p:ph type="title"/>
-          </p:nvPr>
-        </p:nvSpPr>
-        <p:spPr>
-          <a:xfrm>
-            <a:off x="0" y="355981"/>
-            <a:ext cx="12192000" cy="1325563"/>
-          </a:xfrm>
-        </p:spPr>
-        <p:txBody>
-          <a:bodyPr>
-            <a:normAutofit/>
-          </a:bodyPr>
-          <a:lstStyle/>
-          <a:p>
-            <a:pPr algn="ctr"/>
-            <a:r>
-              <a:rPr lang="en-US" sz="3600" b="1" dirty="0">
-                <a:solidFill>
-                  <a:schemeClr val="tx1">
-                    <a:lumMod val="50000"/>
-                    <a:lumOff val="50000"/>
-                  </a:schemeClr>
-                </a:solidFill>
-                <a:latin typeface="Bahnschrift" panose="020B0502040204020203" pitchFamily="34" charset="0"/>
-              </a:rPr>
-              <a:t>Fast Update of Cortical Bulbar Feedback</a:t>
-            </a:r>
-          </a:p>
-        </p:txBody>
-      </p:sp>
       <p:pic>
         <p:nvPicPr>
           <p:cNvPr id="5" name="Content Placeholder 6">
@@ -4922,48 +7212,12 @@
           </a:prstGeom>
         </p:spPr>
       </p:pic>
-    </p:spTree>
-    <p:extLst>
-      <p:ext uri="{BB962C8B-B14F-4D97-AF65-F5344CB8AC3E}">
-        <p14:creationId xmlns:p14="http://schemas.microsoft.com/office/powerpoint/2010/main" val="3756035520"/>
-      </p:ext>
-    </p:extLst>
-  </p:cSld>
-  <p:clrMapOvr>
-    <a:masterClrMapping/>
-  </p:clrMapOvr>
-</p:sld>
-</file>
-
-<file path=ppt/slides/slide9.xml><?xml version="1.0" encoding="utf-8"?>
-<p:sld xmlns:a="http://schemas.openxmlformats.org/drawingml/2006/main" xmlns:r="http://schemas.openxmlformats.org/officeDocument/2006/relationships" xmlns:p="http://schemas.openxmlformats.org/presentationml/2006/main">
-  <p:cSld>
-    <p:spTree>
-      <p:nvGrpSpPr>
-        <p:cNvPr id="1" name="">
-          <a:extLst>
-            <a:ext uri="{FF2B5EF4-FFF2-40B4-BE49-F238E27FC236}">
-              <a16:creationId xmlns:a16="http://schemas.microsoft.com/office/drawing/2014/main" id="{D62EBCC4-0441-6C14-3F97-0C53E4BCB616}"/>
-            </a:ext>
-          </a:extLst>
-        </p:cNvPr>
-        <p:cNvGrpSpPr/>
-        <p:nvPr/>
-      </p:nvGrpSpPr>
-      <p:grpSpPr>
-        <a:xfrm>
-          <a:off x="0" y="0"/>
-          <a:ext cx="0" cy="0"/>
-          <a:chOff x="0" y="0"/>
-          <a:chExt cx="0" cy="0"/>
-        </a:xfrm>
-      </p:grpSpPr>
       <p:sp>
         <p:nvSpPr>
           <p:cNvPr id="2" name="Title 1">
             <a:extLst>
               <a:ext uri="{FF2B5EF4-FFF2-40B4-BE49-F238E27FC236}">
-                <a16:creationId xmlns:a16="http://schemas.microsoft.com/office/drawing/2014/main" id="{8291A1E2-BF84-4B75-9FCD-49D3747906EA}"/>
+                <a16:creationId xmlns:a16="http://schemas.microsoft.com/office/drawing/2014/main" id="{92794F52-A0E4-8789-CFFA-103157F46B2D}"/>
               </a:ext>
             </a:extLst>
           </p:cNvPr>
@@ -4997,51 +7251,15 @@
                 </a:solidFill>
                 <a:latin typeface="Bahnschrift" panose="020B0502040204020203" pitchFamily="34" charset="0"/>
               </a:rPr>
-              <a:t>Fast Update of Cortical Bulbar Feedback</a:t>
-            </a:r>
-          </a:p>
-        </p:txBody>
-      </p:sp>
-      <p:pic>
-        <p:nvPicPr>
-          <p:cNvPr id="5" name="Content Placeholder 6">
-            <a:extLst>
-              <a:ext uri="{FF2B5EF4-FFF2-40B4-BE49-F238E27FC236}">
-                <a16:creationId xmlns:a16="http://schemas.microsoft.com/office/drawing/2014/main" id="{F25880F6-10C7-F3F6-7843-B23055196887}"/>
-              </a:ext>
-            </a:extLst>
-          </p:cNvPr>
-          <p:cNvPicPr>
-            <a:picLocks/>
-          </p:cNvPicPr>
-          <p:nvPr/>
-        </p:nvPicPr>
-        <p:blipFill>
-          <a:blip r:embed="rId2">
-            <a:alphaModFix/>
-            <a:extLst>
-              <a:ext uri="{28A0092B-C50C-407E-A947-70E740481C1C}">
-                <a14:useLocalDpi xmlns:a14="http://schemas.microsoft.com/office/drawing/2010/main" val="0"/>
-              </a:ext>
-            </a:extLst>
-          </a:blip>
-          <a:srcRect/>
-          <a:stretch/>
-        </p:blipFill>
-        <p:spPr>
-          <a:xfrm>
-            <a:off x="1562666" y="1681544"/>
-            <a:ext cx="9066667" cy="4133333"/>
-          </a:xfrm>
-          <a:prstGeom prst="rect">
-            <a:avLst/>
-          </a:prstGeom>
-        </p:spPr>
-      </p:pic>
+              <a:t>Fast Update of Cortico-Bulbar Feedback</a:t>
+            </a:r>
+          </a:p>
+        </p:txBody>
+      </p:sp>
     </p:spTree>
     <p:extLst>
       <p:ext uri="{BB962C8B-B14F-4D97-AF65-F5344CB8AC3E}">
-        <p14:creationId xmlns:p14="http://schemas.microsoft.com/office/powerpoint/2010/main" val="27161434"/>
+        <p14:creationId xmlns:p14="http://schemas.microsoft.com/office/powerpoint/2010/main" val="3756035520"/>
       </p:ext>
     </p:extLst>
   </p:cSld>
@@ -5364,4 +7582,319 @@
     </a:ext>
   </a:extLst>
 </a:theme>
+</file>
+
+<file path=ppt/theme/theme2.xml><?xml version="1.0" encoding="utf-8"?>
+<a:theme xmlns:a="http://schemas.openxmlformats.org/drawingml/2006/main" name="Office Theme">
+  <a:themeElements>
+    <a:clrScheme name="Office">
+      <a:dk1>
+        <a:sysClr val="windowText" lastClr="000000"/>
+      </a:dk1>
+      <a:lt1>
+        <a:sysClr val="window" lastClr="FFFFFF"/>
+      </a:lt1>
+      <a:dk2>
+        <a:srgbClr val="0E2841"/>
+      </a:dk2>
+      <a:lt2>
+        <a:srgbClr val="E8E8E8"/>
+      </a:lt2>
+      <a:accent1>
+        <a:srgbClr val="156082"/>
+      </a:accent1>
+      <a:accent2>
+        <a:srgbClr val="E97132"/>
+      </a:accent2>
+      <a:accent3>
+        <a:srgbClr val="196B24"/>
+      </a:accent3>
+      <a:accent4>
+        <a:srgbClr val="0F9ED5"/>
+      </a:accent4>
+      <a:accent5>
+        <a:srgbClr val="A02B93"/>
+      </a:accent5>
+      <a:accent6>
+        <a:srgbClr val="4EA72E"/>
+      </a:accent6>
+      <a:hlink>
+        <a:srgbClr val="467886"/>
+      </a:hlink>
+      <a:folHlink>
+        <a:srgbClr val="96607D"/>
+      </a:folHlink>
+    </a:clrScheme>
+    <a:fontScheme name="Office">
+      <a:majorFont>
+        <a:latin typeface="Aptos Display" panose="02110004020202020204"/>
+        <a:ea typeface=""/>
+        <a:cs typeface=""/>
+        <a:font script="Jpan" typeface="游ゴシック Light"/>
+        <a:font script="Hang" typeface="맑은 고딕"/>
+        <a:font script="Hans" typeface="等线 Light"/>
+        <a:font script="Hant" typeface="新細明體"/>
+        <a:font script="Arab" typeface="Times New Roman"/>
+        <a:font script="Hebr" typeface="Times New Roman"/>
+        <a:font script="Thai" typeface="Angsana New"/>
+        <a:font script="Ethi" typeface="Nyala"/>
+        <a:font script="Beng" typeface="Vrinda"/>
+        <a:font script="Gujr" typeface="Shruti"/>
+        <a:font script="Khmr" typeface="MoolBoran"/>
+        <a:font script="Knda" typeface="Tunga"/>
+        <a:font script="Guru" typeface="Raavi"/>
+        <a:font script="Cans" typeface="Euphemia"/>
+        <a:font script="Cher" typeface="Plantagenet Cherokee"/>
+        <a:font script="Yiii" typeface="Microsoft Yi Baiti"/>
+        <a:font script="Tibt" typeface="Microsoft Himalaya"/>
+        <a:font script="Thaa" typeface="MV Boli"/>
+        <a:font script="Deva" typeface="Mangal"/>
+        <a:font script="Telu" typeface="Gautami"/>
+        <a:font script="Taml" typeface="Latha"/>
+        <a:font script="Syrc" typeface="Estrangelo Edessa"/>
+        <a:font script="Orya" typeface="Kalinga"/>
+        <a:font script="Mlym" typeface="Kartika"/>
+        <a:font script="Laoo" typeface="DokChampa"/>
+        <a:font script="Sinh" typeface="Iskoola Pota"/>
+        <a:font script="Mong" typeface="Mongolian Baiti"/>
+        <a:font script="Viet" typeface="Times New Roman"/>
+        <a:font script="Uigh" typeface="Microsoft Uighur"/>
+        <a:font script="Geor" typeface="Sylfaen"/>
+        <a:font script="Armn" typeface="Arial"/>
+        <a:font script="Bugi" typeface="Leelawadee UI"/>
+        <a:font script="Bopo" typeface="Microsoft JhengHei"/>
+        <a:font script="Java" typeface="Javanese Text"/>
+        <a:font script="Lisu" typeface="Segoe UI"/>
+        <a:font script="Mymr" typeface="Myanmar Text"/>
+        <a:font script="Nkoo" typeface="Ebrima"/>
+        <a:font script="Olck" typeface="Nirmala UI"/>
+        <a:font script="Osma" typeface="Ebrima"/>
+        <a:font script="Phag" typeface="Phagspa"/>
+        <a:font script="Syrn" typeface="Estrangelo Edessa"/>
+        <a:font script="Syrj" typeface="Estrangelo Edessa"/>
+        <a:font script="Syre" typeface="Estrangelo Edessa"/>
+        <a:font script="Sora" typeface="Nirmala UI"/>
+        <a:font script="Tale" typeface="Microsoft Tai Le"/>
+        <a:font script="Talu" typeface="Microsoft New Tai Lue"/>
+        <a:font script="Tfng" typeface="Ebrima"/>
+      </a:majorFont>
+      <a:minorFont>
+        <a:latin typeface="Aptos" panose="02110004020202020204"/>
+        <a:ea typeface=""/>
+        <a:cs typeface=""/>
+        <a:font script="Jpan" typeface="游ゴシック"/>
+        <a:font script="Hang" typeface="맑은 고딕"/>
+        <a:font script="Hans" typeface="等线"/>
+        <a:font script="Hant" typeface="新細明體"/>
+        <a:font script="Arab" typeface="Arial"/>
+        <a:font script="Hebr" typeface="Arial"/>
+        <a:font script="Thai" typeface="Cordia New"/>
+        <a:font script="Ethi" typeface="Nyala"/>
+        <a:font script="Beng" typeface="Vrinda"/>
+        <a:font script="Gujr" typeface="Shruti"/>
+        <a:font script="Khmr" typeface="DaunPenh"/>
+        <a:font script="Knda" typeface="Tunga"/>
+        <a:font script="Guru" typeface="Raavi"/>
+        <a:font script="Cans" typeface="Euphemia"/>
+        <a:font script="Cher" typeface="Plantagenet Cherokee"/>
+        <a:font script="Yiii" typeface="Microsoft Yi Baiti"/>
+        <a:font script="Tibt" typeface="Microsoft Himalaya"/>
+        <a:font script="Thaa" typeface="MV Boli"/>
+        <a:font script="Deva" typeface="Mangal"/>
+        <a:font script="Telu" typeface="Gautami"/>
+        <a:font script="Taml" typeface="Latha"/>
+        <a:font script="Syrc" typeface="Estrangelo Edessa"/>
+        <a:font script="Orya" typeface="Kalinga"/>
+        <a:font script="Mlym" typeface="Kartika"/>
+        <a:font script="Laoo" typeface="DokChampa"/>
+        <a:font script="Sinh" typeface="Iskoola Pota"/>
+        <a:font script="Mong" typeface="Mongolian Baiti"/>
+        <a:font script="Viet" typeface="Arial"/>
+        <a:font script="Uigh" typeface="Microsoft Uighur"/>
+        <a:font script="Geor" typeface="Sylfaen"/>
+        <a:font script="Armn" typeface="Arial"/>
+        <a:font script="Bugi" typeface="Leelawadee UI"/>
+        <a:font script="Bopo" typeface="Microsoft JhengHei"/>
+        <a:font script="Java" typeface="Javanese Text"/>
+        <a:font script="Lisu" typeface="Segoe UI"/>
+        <a:font script="Mymr" typeface="Myanmar Text"/>
+        <a:font script="Nkoo" typeface="Ebrima"/>
+        <a:font script="Olck" typeface="Nirmala UI"/>
+        <a:font script="Osma" typeface="Ebrima"/>
+        <a:font script="Phag" typeface="Phagspa"/>
+        <a:font script="Syrn" typeface="Estrangelo Edessa"/>
+        <a:font script="Syrj" typeface="Estrangelo Edessa"/>
+        <a:font script="Syre" typeface="Estrangelo Edessa"/>
+        <a:font script="Sora" typeface="Nirmala UI"/>
+        <a:font script="Tale" typeface="Microsoft Tai Le"/>
+        <a:font script="Talu" typeface="Microsoft New Tai Lue"/>
+        <a:font script="Tfng" typeface="Ebrima"/>
+      </a:minorFont>
+    </a:fontScheme>
+    <a:fmtScheme name="Office">
+      <a:fillStyleLst>
+        <a:solidFill>
+          <a:schemeClr val="phClr"/>
+        </a:solidFill>
+        <a:gradFill rotWithShape="1">
+          <a:gsLst>
+            <a:gs pos="0">
+              <a:schemeClr val="phClr">
+                <a:lumMod val="110000"/>
+                <a:satMod val="105000"/>
+                <a:tint val="67000"/>
+              </a:schemeClr>
+            </a:gs>
+            <a:gs pos="50000">
+              <a:schemeClr val="phClr">
+                <a:lumMod val="105000"/>
+                <a:satMod val="103000"/>
+                <a:tint val="73000"/>
+              </a:schemeClr>
+            </a:gs>
+            <a:gs pos="100000">
+              <a:schemeClr val="phClr">
+                <a:lumMod val="105000"/>
+                <a:satMod val="109000"/>
+                <a:tint val="81000"/>
+              </a:schemeClr>
+            </a:gs>
+          </a:gsLst>
+          <a:lin ang="5400000" scaled="0"/>
+        </a:gradFill>
+        <a:gradFill rotWithShape="1">
+          <a:gsLst>
+            <a:gs pos="0">
+              <a:schemeClr val="phClr">
+                <a:satMod val="103000"/>
+                <a:lumMod val="102000"/>
+                <a:tint val="94000"/>
+              </a:schemeClr>
+            </a:gs>
+            <a:gs pos="50000">
+              <a:schemeClr val="phClr">
+                <a:satMod val="110000"/>
+                <a:lumMod val="100000"/>
+                <a:shade val="100000"/>
+              </a:schemeClr>
+            </a:gs>
+            <a:gs pos="100000">
+              <a:schemeClr val="phClr">
+                <a:lumMod val="99000"/>
+                <a:satMod val="120000"/>
+                <a:shade val="78000"/>
+              </a:schemeClr>
+            </a:gs>
+          </a:gsLst>
+          <a:lin ang="5400000" scaled="0"/>
+        </a:gradFill>
+      </a:fillStyleLst>
+      <a:lnStyleLst>
+        <a:ln w="12700" cap="flat" cmpd="sng" algn="ctr">
+          <a:solidFill>
+            <a:schemeClr val="phClr"/>
+          </a:solidFill>
+          <a:prstDash val="solid"/>
+          <a:miter lim="800000"/>
+        </a:ln>
+        <a:ln w="19050" cap="flat" cmpd="sng" algn="ctr">
+          <a:solidFill>
+            <a:schemeClr val="phClr"/>
+          </a:solidFill>
+          <a:prstDash val="solid"/>
+          <a:miter lim="800000"/>
+        </a:ln>
+        <a:ln w="25400" cap="flat" cmpd="sng" algn="ctr">
+          <a:solidFill>
+            <a:schemeClr val="phClr"/>
+          </a:solidFill>
+          <a:prstDash val="solid"/>
+          <a:miter lim="800000"/>
+        </a:ln>
+      </a:lnStyleLst>
+      <a:effectStyleLst>
+        <a:effectStyle>
+          <a:effectLst/>
+        </a:effectStyle>
+        <a:effectStyle>
+          <a:effectLst/>
+        </a:effectStyle>
+        <a:effectStyle>
+          <a:effectLst>
+            <a:outerShdw blurRad="57150" dist="19050" dir="5400000" algn="ctr" rotWithShape="0">
+              <a:srgbClr val="000000">
+                <a:alpha val="63000"/>
+              </a:srgbClr>
+            </a:outerShdw>
+          </a:effectLst>
+        </a:effectStyle>
+      </a:effectStyleLst>
+      <a:bgFillStyleLst>
+        <a:solidFill>
+          <a:schemeClr val="phClr"/>
+        </a:solidFill>
+        <a:solidFill>
+          <a:schemeClr val="phClr">
+            <a:tint val="95000"/>
+            <a:satMod val="170000"/>
+          </a:schemeClr>
+        </a:solidFill>
+        <a:gradFill rotWithShape="1">
+          <a:gsLst>
+            <a:gs pos="0">
+              <a:schemeClr val="phClr">
+                <a:tint val="93000"/>
+                <a:satMod val="150000"/>
+                <a:shade val="98000"/>
+                <a:lumMod val="102000"/>
+              </a:schemeClr>
+            </a:gs>
+            <a:gs pos="50000">
+              <a:schemeClr val="phClr">
+                <a:tint val="98000"/>
+                <a:satMod val="130000"/>
+                <a:shade val="90000"/>
+                <a:lumMod val="103000"/>
+              </a:schemeClr>
+            </a:gs>
+            <a:gs pos="100000">
+              <a:schemeClr val="phClr">
+                <a:shade val="63000"/>
+                <a:satMod val="120000"/>
+              </a:schemeClr>
+            </a:gs>
+          </a:gsLst>
+          <a:lin ang="5400000" scaled="0"/>
+        </a:gradFill>
+      </a:bgFillStyleLst>
+    </a:fmtScheme>
+  </a:themeElements>
+  <a:objectDefaults>
+    <a:lnDef>
+      <a:spPr/>
+      <a:bodyPr/>
+      <a:lstStyle/>
+      <a:style>
+        <a:lnRef idx="2">
+          <a:schemeClr val="accent1"/>
+        </a:lnRef>
+        <a:fillRef idx="0">
+          <a:schemeClr val="accent1"/>
+        </a:fillRef>
+        <a:effectRef idx="1">
+          <a:schemeClr val="accent1"/>
+        </a:effectRef>
+        <a:fontRef idx="minor">
+          <a:schemeClr val="tx1"/>
+        </a:fontRef>
+      </a:style>
+    </a:lnDef>
+  </a:objectDefaults>
+  <a:extraClrSchemeLst/>
+  <a:extLst>
+    <a:ext uri="{05A4C25C-085E-4340-85A3-A5531E510DB2}">
+      <thm15:themeFamily xmlns:thm15="http://schemas.microsoft.com/office/thememl/2012/main" name="Office Theme" id="{2E142A2C-CD16-42D6-873A-C26D2A0506FA}" vid="{1BDDFF52-6CD6-40A5-AB3C-68EB2F1E4D0A}"/>
+    </a:ext>
+  </a:extLst>
+</a:theme>
 </file>